--- a/assets/figures-editable/c1-c2/c2-e26.pptx
+++ b/assets/figures-editable/c1-c2/c2-e26.pptx
@@ -7,7 +7,7 @@
   <p:sldIdLst>
     <p:sldId id="256" r:id="rId7"/>
   </p:sldIdLst>
-  <p:sldSz cx="11948160" cy="7924799" type="screen4x3"/>
+  <p:sldSz cx="12191695" cy="6858000" type="screen4x3"/>
   <p:notesSz cx="6858000" cy="9144000"/>
   <p:defaultTextStyle>
     <a:defPPr>
@@ -3098,14 +3098,14 @@
       <p:grpSpPr/>
       <p:sp>
         <p:nvSpPr>
-          <p:cNvPr id="2" name="text1" descr="sci-ppt:C2-E26-001"/>
+          <p:cNvPr id="2" name="C2-E26 text 0" descr="sci-ppt:o000"/>
           <p:cNvSpPr txBox="1"/>
           <p:nvPr/>
         </p:nvSpPr>
         <p:spPr>
           <a:xfrm>
-            <a:off x="316992" y="268224"/>
-            <a:ext cx="11277600" cy="359054"/>
+            <a:off x="274320" y="118872"/>
+            <a:ext cx="11612880" cy="340105"/>
           </a:xfrm>
           <a:prstGeom prst="rect">
             <a:avLst/>
@@ -3114,7 +3114,7 @@
           <a:effectLst/>
         </p:spPr>
         <p:txBody>
-          <a:bodyPr wrap="none" lIns="27432" rIns="27432" tIns="18288" bIns="18288" anchor="ctr">
+          <a:bodyPr wrap="none" lIns="18288" rIns="18288" tIns="18288" bIns="18288" anchor="t">
             <a:spAutoFit/>
           </a:bodyPr>
           <a:lstStyle/>
@@ -3125,75 +3125,115 @@
               </a:spcAft>
             </a:pPr>
             <a:r>
-              <a:rPr sz="1823" b="0" i="0">
+              <a:rPr sz="1900" b="1" i="0">
                 <a:solidFill>
                   <a:srgbClr val="8EDBD4"/>
                 </a:solidFill>
                 <a:latin typeface="Arial"/>
               </a:rPr>
-              <a:t>C2-E26 | Physical-variable diagram</a:t>
+              <a:t>C2-E26 · Finite-inventory equilibrium benchmark</a:t>
             </a:r>
           </a:p>
         </p:txBody>
       </p:sp>
       <p:cxnSp>
         <p:nvCxnSpPr>
-          <p:cNvPr id="3" name="arrow2" descr="sci-ppt:C2-E26-002"/>
+          <p:cNvPr id="3" name="C2-E26 line 1" descr="sci-ppt:o001"/>
           <p:cNvCxnSpPr/>
           <p:nvPr/>
         </p:nvCxnSpPr>
         <p:spPr>
           <a:xfrm>
-            <a:off x="2194560" y="3962399"/>
-            <a:ext cx="7924800" cy="0"/>
+            <a:off x="914400" y="5029200"/>
+            <a:ext cx="6400800" cy="0"/>
           </a:xfrm>
           <a:prstGeom prst="line">
             <a:avLst/>
           </a:prstGeom>
-          <a:ln w="25400">
+          <a:ln w="19050">
             <a:solidFill>
-              <a:srgbClr val="8EDBD4"/>
+              <a:srgbClr val="B4C7D2"/>
             </a:solidFill>
-            <a:headEnd type="none" w="med" len="med"/>
-            <a:tailEnd type="triangle" w="med" len="med"/>
           </a:ln>
           <a:effectLst/>
         </p:spPr>
       </p:cxnSp>
       <p:cxnSp>
         <p:nvCxnSpPr>
-          <p:cNvPr id="4" name="arrow3" descr="sci-ppt:C2-E26-003"/>
+          <p:cNvPr id="4" name="C2-E26 line 2" descr="sci-ppt:o002"/>
           <p:cNvCxnSpPr/>
           <p:nvPr/>
         </p:nvCxnSpPr>
         <p:spPr>
-          <a:xfrm flipV="1">
-            <a:off x="2194560" y="1524000"/>
-            <a:ext cx="0" cy="2438399"/>
+          <a:xfrm>
+            <a:off x="914400" y="1371600"/>
+            <a:ext cx="0" cy="3657600"/>
           </a:xfrm>
           <a:prstGeom prst="line">
             <a:avLst/>
           </a:prstGeom>
-          <a:ln w="25400">
+          <a:ln w="19050">
             <a:solidFill>
-              <a:srgbClr val="8EDBD4"/>
+              <a:srgbClr val="B4C7D2"/>
             </a:solidFill>
-            <a:headEnd type="none" w="med" len="med"/>
-            <a:tailEnd type="triangle" w="med" len="med"/>
           </a:ln>
           <a:effectLst/>
         </p:spPr>
       </p:cxnSp>
-      <p:sp>
-        <p:nvSpPr>
-          <p:cNvPr id="5" name="text4" descr="sci-ppt:C2-E26-004"/>
+      <p:cxnSp>
+        <p:nvCxnSpPr>
+          <p:cNvPr id="5" name="C2-E26 line 3" descr="sci-ppt:o003"/>
+          <p:cNvCxnSpPr/>
+          <p:nvPr/>
+        </p:nvCxnSpPr>
+        <p:spPr>
+          <a:xfrm>
+            <a:off x="914400" y="5029200"/>
+            <a:ext cx="0" cy="64008"/>
+          </a:xfrm>
+          <a:prstGeom prst="line">
+            <a:avLst/>
+          </a:prstGeom>
+          <a:ln w="12700">
+            <a:solidFill>
+              <a:srgbClr val="B4C7D2"/>
+            </a:solidFill>
+          </a:ln>
+          <a:effectLst/>
+        </p:spPr>
+      </p:cxnSp>
+      <p:cxnSp>
+        <p:nvCxnSpPr>
+          <p:cNvPr id="6" name="C2-E26 line 4" descr="sci-ppt:o004"/>
+          <p:cNvCxnSpPr/>
+          <p:nvPr/>
+        </p:nvCxnSpPr>
+        <p:spPr>
+          <a:xfrm>
+            <a:off x="914400" y="1371600"/>
+            <a:ext cx="0" cy="3657600"/>
+          </a:xfrm>
+          <a:prstGeom prst="line">
+            <a:avLst/>
+          </a:prstGeom>
+          <a:ln w="7620">
+            <a:solidFill>
+              <a:srgbClr val="2E4756"/>
+            </a:solidFill>
+          </a:ln>
+          <a:effectLst/>
+        </p:spPr>
+      </p:cxnSp>
+      <p:sp>
+        <p:nvSpPr>
+          <p:cNvPr id="7" name="C2-E26 text 5" descr="sci-ppt:o005"/>
           <p:cNvSpPr txBox="1"/>
           <p:nvPr/>
         </p:nvSpPr>
         <p:spPr>
           <a:xfrm>
-            <a:off x="9144000" y="4084320"/>
-            <a:ext cx="1828800" cy="321259"/>
+            <a:off x="457200" y="5111496"/>
+            <a:ext cx="914400" cy="208407"/>
           </a:xfrm>
           <a:prstGeom prst="rect">
             <a:avLst/>
@@ -3202,7 +3242,591 @@
           <a:effectLst/>
         </p:spPr>
         <p:txBody>
-          <a:bodyPr wrap="none" lIns="27432" rIns="27432" tIns="18288" bIns="18288" anchor="ctr">
+          <a:bodyPr wrap="none" lIns="18288" rIns="18288" tIns="18288" bIns="18288" anchor="t">
+            <a:spAutoFit/>
+          </a:bodyPr>
+          <a:lstStyle/>
+          <a:p>
+            <a:pPr algn="ctr">
+              <a:spcAft>
+                <a:spcPts val="0"/>
+              </a:spcAft>
+            </a:pPr>
+            <a:r>
+              <a:rPr sz="1050" b="0" i="0">
+                <a:solidFill>
+                  <a:srgbClr val="B4C7D2"/>
+                </a:solidFill>
+                <a:latin typeface="Arial"/>
+              </a:rPr>
+              <a:t>5</a:t>
+            </a:r>
+          </a:p>
+        </p:txBody>
+      </p:sp>
+      <p:cxnSp>
+        <p:nvCxnSpPr>
+          <p:cNvPr id="8" name="C2-E26 line 6" descr="sci-ppt:o006"/>
+          <p:cNvCxnSpPr/>
+          <p:nvPr/>
+        </p:nvCxnSpPr>
+        <p:spPr>
+          <a:xfrm>
+            <a:off x="2514600" y="5029200"/>
+            <a:ext cx="0" cy="64008"/>
+          </a:xfrm>
+          <a:prstGeom prst="line">
+            <a:avLst/>
+          </a:prstGeom>
+          <a:ln w="12700">
+            <a:solidFill>
+              <a:srgbClr val="B4C7D2"/>
+            </a:solidFill>
+          </a:ln>
+          <a:effectLst/>
+        </p:spPr>
+      </p:cxnSp>
+      <p:cxnSp>
+        <p:nvCxnSpPr>
+          <p:cNvPr id="9" name="C2-E26 line 7" descr="sci-ppt:o007"/>
+          <p:cNvCxnSpPr/>
+          <p:nvPr/>
+        </p:nvCxnSpPr>
+        <p:spPr>
+          <a:xfrm>
+            <a:off x="2514600" y="1371600"/>
+            <a:ext cx="0" cy="3657600"/>
+          </a:xfrm>
+          <a:prstGeom prst="line">
+            <a:avLst/>
+          </a:prstGeom>
+          <a:ln w="7620">
+            <a:solidFill>
+              <a:srgbClr val="2E4756"/>
+            </a:solidFill>
+          </a:ln>
+          <a:effectLst/>
+        </p:spPr>
+      </p:cxnSp>
+      <p:sp>
+        <p:nvSpPr>
+          <p:cNvPr id="10" name="C2-E26 text 8" descr="sci-ppt:o008"/>
+          <p:cNvSpPr txBox="1"/>
+          <p:nvPr/>
+        </p:nvSpPr>
+        <p:spPr>
+          <a:xfrm>
+            <a:off x="2057400" y="5111496"/>
+            <a:ext cx="914400" cy="208407"/>
+          </a:xfrm>
+          <a:prstGeom prst="rect">
+            <a:avLst/>
+          </a:prstGeom>
+          <a:noFill/>
+          <a:effectLst/>
+        </p:spPr>
+        <p:txBody>
+          <a:bodyPr wrap="none" lIns="18288" rIns="18288" tIns="18288" bIns="18288" anchor="t">
+            <a:spAutoFit/>
+          </a:bodyPr>
+          <a:lstStyle/>
+          <a:p>
+            <a:pPr algn="ctr">
+              <a:spcAft>
+                <a:spcPts val="0"/>
+              </a:spcAft>
+            </a:pPr>
+            <a:r>
+              <a:rPr sz="1050" b="0" i="0">
+                <a:solidFill>
+                  <a:srgbClr val="B4C7D2"/>
+                </a:solidFill>
+                <a:latin typeface="Arial"/>
+              </a:rPr>
+              <a:t>10</a:t>
+            </a:r>
+          </a:p>
+        </p:txBody>
+      </p:sp>
+      <p:cxnSp>
+        <p:nvCxnSpPr>
+          <p:cNvPr id="11" name="C2-E26 line 9" descr="sci-ppt:o009"/>
+          <p:cNvCxnSpPr/>
+          <p:nvPr/>
+        </p:nvCxnSpPr>
+        <p:spPr>
+          <a:xfrm>
+            <a:off x="4114800" y="5029200"/>
+            <a:ext cx="0" cy="64008"/>
+          </a:xfrm>
+          <a:prstGeom prst="line">
+            <a:avLst/>
+          </a:prstGeom>
+          <a:ln w="12700">
+            <a:solidFill>
+              <a:srgbClr val="B4C7D2"/>
+            </a:solidFill>
+          </a:ln>
+          <a:effectLst/>
+        </p:spPr>
+      </p:cxnSp>
+      <p:cxnSp>
+        <p:nvCxnSpPr>
+          <p:cNvPr id="12" name="C2-E26 line 10" descr="sci-ppt:o010"/>
+          <p:cNvCxnSpPr/>
+          <p:nvPr/>
+        </p:nvCxnSpPr>
+        <p:spPr>
+          <a:xfrm>
+            <a:off x="4114800" y="1371600"/>
+            <a:ext cx="0" cy="3657600"/>
+          </a:xfrm>
+          <a:prstGeom prst="line">
+            <a:avLst/>
+          </a:prstGeom>
+          <a:ln w="7620">
+            <a:solidFill>
+              <a:srgbClr val="2E4756"/>
+            </a:solidFill>
+          </a:ln>
+          <a:effectLst/>
+        </p:spPr>
+      </p:cxnSp>
+      <p:sp>
+        <p:nvSpPr>
+          <p:cNvPr id="13" name="C2-E26 text 11" descr="sci-ppt:o011"/>
+          <p:cNvSpPr txBox="1"/>
+          <p:nvPr/>
+        </p:nvSpPr>
+        <p:spPr>
+          <a:xfrm>
+            <a:off x="3657600" y="5111496"/>
+            <a:ext cx="914400" cy="208407"/>
+          </a:xfrm>
+          <a:prstGeom prst="rect">
+            <a:avLst/>
+          </a:prstGeom>
+          <a:noFill/>
+          <a:effectLst/>
+        </p:spPr>
+        <p:txBody>
+          <a:bodyPr wrap="none" lIns="18288" rIns="18288" tIns="18288" bIns="18288" anchor="t">
+            <a:spAutoFit/>
+          </a:bodyPr>
+          <a:lstStyle/>
+          <a:p>
+            <a:pPr algn="ctr">
+              <a:spcAft>
+                <a:spcPts val="0"/>
+              </a:spcAft>
+            </a:pPr>
+            <a:r>
+              <a:rPr sz="1050" b="0" i="0">
+                <a:solidFill>
+                  <a:srgbClr val="B4C7D2"/>
+                </a:solidFill>
+                <a:latin typeface="Arial"/>
+              </a:rPr>
+              <a:t>20</a:t>
+            </a:r>
+          </a:p>
+        </p:txBody>
+      </p:sp>
+      <p:cxnSp>
+        <p:nvCxnSpPr>
+          <p:cNvPr id="14" name="C2-E26 line 12" descr="sci-ppt:o012"/>
+          <p:cNvCxnSpPr/>
+          <p:nvPr/>
+        </p:nvCxnSpPr>
+        <p:spPr>
+          <a:xfrm>
+            <a:off x="5715000" y="5029200"/>
+            <a:ext cx="0" cy="64008"/>
+          </a:xfrm>
+          <a:prstGeom prst="line">
+            <a:avLst/>
+          </a:prstGeom>
+          <a:ln w="12700">
+            <a:solidFill>
+              <a:srgbClr val="B4C7D2"/>
+            </a:solidFill>
+          </a:ln>
+          <a:effectLst/>
+        </p:spPr>
+      </p:cxnSp>
+      <p:cxnSp>
+        <p:nvCxnSpPr>
+          <p:cNvPr id="15" name="C2-E26 line 13" descr="sci-ppt:o013"/>
+          <p:cNvCxnSpPr/>
+          <p:nvPr/>
+        </p:nvCxnSpPr>
+        <p:spPr>
+          <a:xfrm>
+            <a:off x="5715000" y="1371600"/>
+            <a:ext cx="0" cy="3657600"/>
+          </a:xfrm>
+          <a:prstGeom prst="line">
+            <a:avLst/>
+          </a:prstGeom>
+          <a:ln w="7620">
+            <a:solidFill>
+              <a:srgbClr val="2E4756"/>
+            </a:solidFill>
+          </a:ln>
+          <a:effectLst/>
+        </p:spPr>
+      </p:cxnSp>
+      <p:sp>
+        <p:nvSpPr>
+          <p:cNvPr id="16" name="C2-E26 text 14" descr="sci-ppt:o014"/>
+          <p:cNvSpPr txBox="1"/>
+          <p:nvPr/>
+        </p:nvSpPr>
+        <p:spPr>
+          <a:xfrm>
+            <a:off x="5257800" y="5111496"/>
+            <a:ext cx="914400" cy="208407"/>
+          </a:xfrm>
+          <a:prstGeom prst="rect">
+            <a:avLst/>
+          </a:prstGeom>
+          <a:noFill/>
+          <a:effectLst/>
+        </p:spPr>
+        <p:txBody>
+          <a:bodyPr wrap="none" lIns="18288" rIns="18288" tIns="18288" bIns="18288" anchor="t">
+            <a:spAutoFit/>
+          </a:bodyPr>
+          <a:lstStyle/>
+          <a:p>
+            <a:pPr algn="ctr">
+              <a:spcAft>
+                <a:spcPts val="0"/>
+              </a:spcAft>
+            </a:pPr>
+            <a:r>
+              <a:rPr sz="1050" b="0" i="0">
+                <a:solidFill>
+                  <a:srgbClr val="B4C7D2"/>
+                </a:solidFill>
+                <a:latin typeface="Arial"/>
+              </a:rPr>
+              <a:t>40</a:t>
+            </a:r>
+          </a:p>
+        </p:txBody>
+      </p:sp>
+      <p:cxnSp>
+        <p:nvCxnSpPr>
+          <p:cNvPr id="17" name="C2-E26 line 15" descr="sci-ppt:o015"/>
+          <p:cNvCxnSpPr/>
+          <p:nvPr/>
+        </p:nvCxnSpPr>
+        <p:spPr>
+          <a:xfrm>
+            <a:off x="7315200" y="5029200"/>
+            <a:ext cx="0" cy="64008"/>
+          </a:xfrm>
+          <a:prstGeom prst="line">
+            <a:avLst/>
+          </a:prstGeom>
+          <a:ln w="12700">
+            <a:solidFill>
+              <a:srgbClr val="B4C7D2"/>
+            </a:solidFill>
+          </a:ln>
+          <a:effectLst/>
+        </p:spPr>
+      </p:cxnSp>
+      <p:cxnSp>
+        <p:nvCxnSpPr>
+          <p:cNvPr id="18" name="C2-E26 line 16" descr="sci-ppt:o016"/>
+          <p:cNvCxnSpPr/>
+          <p:nvPr/>
+        </p:nvCxnSpPr>
+        <p:spPr>
+          <a:xfrm>
+            <a:off x="7315200" y="1371600"/>
+            <a:ext cx="0" cy="3657600"/>
+          </a:xfrm>
+          <a:prstGeom prst="line">
+            <a:avLst/>
+          </a:prstGeom>
+          <a:ln w="7620">
+            <a:solidFill>
+              <a:srgbClr val="2E4756"/>
+            </a:solidFill>
+          </a:ln>
+          <a:effectLst/>
+        </p:spPr>
+      </p:cxnSp>
+      <p:sp>
+        <p:nvSpPr>
+          <p:cNvPr id="19" name="C2-E26 text 17" descr="sci-ppt:o017"/>
+          <p:cNvSpPr txBox="1"/>
+          <p:nvPr/>
+        </p:nvSpPr>
+        <p:spPr>
+          <a:xfrm>
+            <a:off x="6858000" y="5111496"/>
+            <a:ext cx="914400" cy="208407"/>
+          </a:xfrm>
+          <a:prstGeom prst="rect">
+            <a:avLst/>
+          </a:prstGeom>
+          <a:noFill/>
+          <a:effectLst/>
+        </p:spPr>
+        <p:txBody>
+          <a:bodyPr wrap="none" lIns="18288" rIns="18288" tIns="18288" bIns="18288" anchor="t">
+            <a:spAutoFit/>
+          </a:bodyPr>
+          <a:lstStyle/>
+          <a:p>
+            <a:pPr algn="ctr">
+              <a:spcAft>
+                <a:spcPts val="0"/>
+              </a:spcAft>
+            </a:pPr>
+            <a:r>
+              <a:rPr sz="1050" b="0" i="0">
+                <a:solidFill>
+                  <a:srgbClr val="B4C7D2"/>
+                </a:solidFill>
+                <a:latin typeface="Arial"/>
+              </a:rPr>
+              <a:t>80</a:t>
+            </a:r>
+          </a:p>
+        </p:txBody>
+      </p:sp>
+      <p:cxnSp>
+        <p:nvCxnSpPr>
+          <p:cNvPr id="20" name="C2-E26 line 18" descr="sci-ppt:o018"/>
+          <p:cNvCxnSpPr/>
+          <p:nvPr/>
+        </p:nvCxnSpPr>
+        <p:spPr>
+          <a:xfrm>
+            <a:off x="850392" y="4168438"/>
+            <a:ext cx="64008" cy="0"/>
+          </a:xfrm>
+          <a:prstGeom prst="line">
+            <a:avLst/>
+          </a:prstGeom>
+          <a:ln w="12700">
+            <a:solidFill>
+              <a:srgbClr val="B4C7D2"/>
+            </a:solidFill>
+          </a:ln>
+          <a:effectLst/>
+        </p:spPr>
+      </p:cxnSp>
+      <p:cxnSp>
+        <p:nvCxnSpPr>
+          <p:cNvPr id="21" name="C2-E26 line 19" descr="sci-ppt:o019"/>
+          <p:cNvCxnSpPr/>
+          <p:nvPr/>
+        </p:nvCxnSpPr>
+        <p:spPr>
+          <a:xfrm>
+            <a:off x="914400" y="4168438"/>
+            <a:ext cx="6400800" cy="0"/>
+          </a:xfrm>
+          <a:prstGeom prst="line">
+            <a:avLst/>
+          </a:prstGeom>
+          <a:ln w="7620">
+            <a:solidFill>
+              <a:srgbClr val="2E4756"/>
+            </a:solidFill>
+          </a:ln>
+          <a:effectLst/>
+        </p:spPr>
+      </p:cxnSp>
+      <p:sp>
+        <p:nvSpPr>
+          <p:cNvPr id="22" name="C2-E26 text 20" descr="sci-ppt:o020"/>
+          <p:cNvSpPr txBox="1"/>
+          <p:nvPr/>
+        </p:nvSpPr>
+        <p:spPr>
+          <a:xfrm>
+            <a:off x="45720" y="4086142"/>
+            <a:ext cx="777240" cy="208407"/>
+          </a:xfrm>
+          <a:prstGeom prst="rect">
+            <a:avLst/>
+          </a:prstGeom>
+          <a:noFill/>
+          <a:effectLst/>
+        </p:spPr>
+        <p:txBody>
+          <a:bodyPr wrap="none" lIns="18288" rIns="18288" tIns="18288" bIns="18288" anchor="t">
+            <a:spAutoFit/>
+          </a:bodyPr>
+          <a:lstStyle/>
+          <a:p>
+            <a:pPr algn="r">
+              <a:spcAft>
+                <a:spcPts val="0"/>
+              </a:spcAft>
+            </a:pPr>
+            <a:r>
+              <a:rPr sz="1050" b="0" i="0">
+                <a:solidFill>
+                  <a:srgbClr val="B4C7D2"/>
+                </a:solidFill>
+                <a:latin typeface="Arial"/>
+              </a:rPr>
+              <a:t>1e+04</a:t>
+            </a:r>
+          </a:p>
+        </p:txBody>
+      </p:sp>
+      <p:cxnSp>
+        <p:nvCxnSpPr>
+          <p:cNvPr id="23" name="C2-E26 line 21" descr="sci-ppt:o021"/>
+          <p:cNvCxnSpPr/>
+          <p:nvPr/>
+        </p:nvCxnSpPr>
+        <p:spPr>
+          <a:xfrm>
+            <a:off x="850392" y="2522242"/>
+            <a:ext cx="64008" cy="0"/>
+          </a:xfrm>
+          <a:prstGeom prst="line">
+            <a:avLst/>
+          </a:prstGeom>
+          <a:ln w="12700">
+            <a:solidFill>
+              <a:srgbClr val="B4C7D2"/>
+            </a:solidFill>
+          </a:ln>
+          <a:effectLst/>
+        </p:spPr>
+      </p:cxnSp>
+      <p:cxnSp>
+        <p:nvCxnSpPr>
+          <p:cNvPr id="24" name="C2-E26 line 22" descr="sci-ppt:o022"/>
+          <p:cNvCxnSpPr/>
+          <p:nvPr/>
+        </p:nvCxnSpPr>
+        <p:spPr>
+          <a:xfrm>
+            <a:off x="914400" y="2522242"/>
+            <a:ext cx="6400800" cy="0"/>
+          </a:xfrm>
+          <a:prstGeom prst="line">
+            <a:avLst/>
+          </a:prstGeom>
+          <a:ln w="7620">
+            <a:solidFill>
+              <a:srgbClr val="2E4756"/>
+            </a:solidFill>
+          </a:ln>
+          <a:effectLst/>
+        </p:spPr>
+      </p:cxnSp>
+      <p:sp>
+        <p:nvSpPr>
+          <p:cNvPr id="25" name="C2-E26 text 23" descr="sci-ppt:o023"/>
+          <p:cNvSpPr txBox="1"/>
+          <p:nvPr/>
+        </p:nvSpPr>
+        <p:spPr>
+          <a:xfrm>
+            <a:off x="45720" y="2439946"/>
+            <a:ext cx="777240" cy="208407"/>
+          </a:xfrm>
+          <a:prstGeom prst="rect">
+            <a:avLst/>
+          </a:prstGeom>
+          <a:noFill/>
+          <a:effectLst/>
+        </p:spPr>
+        <p:txBody>
+          <a:bodyPr wrap="none" lIns="18288" rIns="18288" tIns="18288" bIns="18288" anchor="t">
+            <a:spAutoFit/>
+          </a:bodyPr>
+          <a:lstStyle/>
+          <a:p>
+            <a:pPr algn="r">
+              <a:spcAft>
+                <a:spcPts val="0"/>
+              </a:spcAft>
+            </a:pPr>
+            <a:r>
+              <a:rPr sz="1050" b="0" i="0">
+                <a:solidFill>
+                  <a:srgbClr val="B4C7D2"/>
+                </a:solidFill>
+                <a:latin typeface="Arial"/>
+              </a:rPr>
+              <a:t>1e+05</a:t>
+            </a:r>
+          </a:p>
+        </p:txBody>
+      </p:sp>
+      <p:sp>
+        <p:nvSpPr>
+          <p:cNvPr id="26" name="C2-E26 text 24" descr="sci-ppt:o024"/>
+          <p:cNvSpPr txBox="1"/>
+          <p:nvPr/>
+        </p:nvSpPr>
+        <p:spPr>
+          <a:xfrm>
+            <a:off x="914400" y="5312664"/>
+            <a:ext cx="6400800" cy="231648"/>
+          </a:xfrm>
+          <a:prstGeom prst="rect">
+            <a:avLst/>
+          </a:prstGeom>
+          <a:noFill/>
+          <a:effectLst/>
+        </p:spPr>
+        <p:txBody>
+          <a:bodyPr wrap="none" lIns="18288" rIns="18288" tIns="18288" bIns="18288" anchor="t">
+            <a:spAutoFit/>
+          </a:bodyPr>
+          <a:lstStyle/>
+          <a:p>
+            <a:pPr algn="ctr">
+              <a:spcAft>
+                <a:spcPts val="0"/>
+              </a:spcAft>
+            </a:pPr>
+            <a:r>
+              <a:rPr sz="1200" b="0" i="0">
+                <a:solidFill>
+                  <a:srgbClr val="E7F0F3"/>
+                </a:solidFill>
+                <a:latin typeface="Arial"/>
+              </a:rPr>
+              <a:t>bubble radius R  (µm)</a:t>
+            </a:r>
+          </a:p>
+        </p:txBody>
+      </p:sp>
+      <p:sp>
+        <p:nvSpPr>
+          <p:cNvPr id="27" name="C2-E26 text 25" descr="sci-ppt:o025"/>
+          <p:cNvSpPr txBox="1"/>
+          <p:nvPr/>
+        </p:nvSpPr>
+        <p:spPr>
+          <a:xfrm>
+            <a:off x="365760" y="1024128"/>
+            <a:ext cx="6400800" cy="231648"/>
+          </a:xfrm>
+          <a:prstGeom prst="rect">
+            <a:avLst/>
+          </a:prstGeom>
+          <a:noFill/>
+          <a:effectLst/>
+        </p:spPr>
+        <p:txBody>
+          <a:bodyPr wrap="none" lIns="18288" rIns="18288" tIns="18288" bIns="18288" anchor="t">
             <a:spAutoFit/>
           </a:bodyPr>
           <a:lstStyle/>
@@ -3213,27 +3837,726 @@
               </a:spcAft>
             </a:pPr>
             <a:r>
-              <a:rPr sz="1632" b="0" i="0">
+              <a:rPr sz="1200" b="0" i="0">
                 <a:solidFill>
                   <a:srgbClr val="E7F0F3"/>
                 </a:solidFill>
                 <a:latin typeface="Arial"/>
               </a:rPr>
-              <a:t>Vapor volume V_b</a:t>
-            </a:r>
-          </a:p>
-        </p:txBody>
-      </p:sp>
-      <p:sp>
-        <p:nvSpPr>
-          <p:cNvPr id="6" name="text5" descr="sci-ppt:C2-E26-005"/>
+              <a:t>pᵥ,PFC,eq  (Pa)</a:t>
+            </a:r>
+          </a:p>
+        </p:txBody>
+      </p:sp>
+      <p:sp>
+        <p:nvSpPr>
+          <p:cNvPr id="28" name="C2-E26 polygon 26" descr="sci-ppt:o026"/>
+          <p:cNvSpPr/>
+          <p:nvPr/>
+        </p:nvSpPr>
+        <p:spPr>
+          <a:xfrm>
+            <a:off x="914400" y="2242450"/>
+            <a:ext cx="6368635" cy="2627066"/>
+          </a:xfrm>
+          <a:custGeom>
+            <a:avLst/>
+            <a:gdLst/>
+            <a:ahLst/>
+            <a:cxnLst/>
+            <a:rect l="l" t="t" r="r" b="b"/>
+            <a:pathLst>
+              <a:path w="6368635" h="2627066">
+                <a:moveTo>
+                  <a:pt x="0" y="0"/>
+                </a:moveTo>
+                <a:lnTo>
+                  <a:pt x="32164" y="0"/>
+                </a:lnTo>
+                <a:lnTo>
+                  <a:pt x="64329" y="0"/>
+                </a:lnTo>
+                <a:lnTo>
+                  <a:pt x="96494" y="0"/>
+                </a:lnTo>
+                <a:lnTo>
+                  <a:pt x="128659" y="0"/>
+                </a:lnTo>
+                <a:lnTo>
+                  <a:pt x="160824" y="0"/>
+                </a:lnTo>
+                <a:lnTo>
+                  <a:pt x="192988" y="0"/>
+                </a:lnTo>
+                <a:lnTo>
+                  <a:pt x="225153" y="0"/>
+                </a:lnTo>
+                <a:lnTo>
+                  <a:pt x="257318" y="0"/>
+                </a:lnTo>
+                <a:lnTo>
+                  <a:pt x="289483" y="0"/>
+                </a:lnTo>
+                <a:lnTo>
+                  <a:pt x="321648" y="0"/>
+                </a:lnTo>
+                <a:lnTo>
+                  <a:pt x="353813" y="0"/>
+                </a:lnTo>
+                <a:lnTo>
+                  <a:pt x="385977" y="0"/>
+                </a:lnTo>
+                <a:lnTo>
+                  <a:pt x="418142" y="0"/>
+                </a:lnTo>
+                <a:lnTo>
+                  <a:pt x="450307" y="0"/>
+                </a:lnTo>
+                <a:lnTo>
+                  <a:pt x="482472" y="0"/>
+                </a:lnTo>
+                <a:lnTo>
+                  <a:pt x="514637" y="0"/>
+                </a:lnTo>
+                <a:lnTo>
+                  <a:pt x="546802" y="0"/>
+                </a:lnTo>
+                <a:lnTo>
+                  <a:pt x="578966" y="0"/>
+                </a:lnTo>
+                <a:lnTo>
+                  <a:pt x="611131" y="0"/>
+                </a:lnTo>
+                <a:lnTo>
+                  <a:pt x="643296" y="0"/>
+                </a:lnTo>
+                <a:lnTo>
+                  <a:pt x="675461" y="0"/>
+                </a:lnTo>
+                <a:lnTo>
+                  <a:pt x="707626" y="0"/>
+                </a:lnTo>
+                <a:lnTo>
+                  <a:pt x="739790" y="0"/>
+                </a:lnTo>
+                <a:lnTo>
+                  <a:pt x="771955" y="0"/>
+                </a:lnTo>
+                <a:lnTo>
+                  <a:pt x="804120" y="0"/>
+                </a:lnTo>
+                <a:lnTo>
+                  <a:pt x="836285" y="0"/>
+                </a:lnTo>
+                <a:lnTo>
+                  <a:pt x="868450" y="0"/>
+                </a:lnTo>
+                <a:lnTo>
+                  <a:pt x="900615" y="0"/>
+                </a:lnTo>
+                <a:lnTo>
+                  <a:pt x="932779" y="0"/>
+                </a:lnTo>
+                <a:lnTo>
+                  <a:pt x="964944" y="0"/>
+                </a:lnTo>
+                <a:lnTo>
+                  <a:pt x="997109" y="0"/>
+                </a:lnTo>
+                <a:lnTo>
+                  <a:pt x="1029274" y="0"/>
+                </a:lnTo>
+                <a:lnTo>
+                  <a:pt x="1061439" y="0"/>
+                </a:lnTo>
+                <a:lnTo>
+                  <a:pt x="1093604" y="0"/>
+                </a:lnTo>
+                <a:lnTo>
+                  <a:pt x="1125768" y="0"/>
+                </a:lnTo>
+                <a:lnTo>
+                  <a:pt x="1157933" y="0"/>
+                </a:lnTo>
+                <a:lnTo>
+                  <a:pt x="1190098" y="0"/>
+                </a:lnTo>
+                <a:lnTo>
+                  <a:pt x="1222263" y="0"/>
+                </a:lnTo>
+                <a:lnTo>
+                  <a:pt x="1254428" y="0"/>
+                </a:lnTo>
+                <a:lnTo>
+                  <a:pt x="1286592" y="0"/>
+                </a:lnTo>
+                <a:lnTo>
+                  <a:pt x="1318757" y="0"/>
+                </a:lnTo>
+                <a:lnTo>
+                  <a:pt x="1350922" y="0"/>
+                </a:lnTo>
+                <a:lnTo>
+                  <a:pt x="1383087" y="0"/>
+                </a:lnTo>
+                <a:lnTo>
+                  <a:pt x="1415252" y="0"/>
+                </a:lnTo>
+                <a:lnTo>
+                  <a:pt x="1447417" y="0"/>
+                </a:lnTo>
+                <a:lnTo>
+                  <a:pt x="1479581" y="0"/>
+                </a:lnTo>
+                <a:lnTo>
+                  <a:pt x="1511746" y="0"/>
+                </a:lnTo>
+                <a:lnTo>
+                  <a:pt x="1543911" y="0"/>
+                </a:lnTo>
+                <a:lnTo>
+                  <a:pt x="1576076" y="0"/>
+                </a:lnTo>
+                <a:lnTo>
+                  <a:pt x="1608241" y="0"/>
+                </a:lnTo>
+                <a:lnTo>
+                  <a:pt x="1640406" y="0"/>
+                </a:lnTo>
+                <a:lnTo>
+                  <a:pt x="1672570" y="0"/>
+                </a:lnTo>
+                <a:lnTo>
+                  <a:pt x="1704735" y="0"/>
+                </a:lnTo>
+                <a:lnTo>
+                  <a:pt x="1736900" y="0"/>
+                </a:lnTo>
+                <a:lnTo>
+                  <a:pt x="1769065" y="0"/>
+                </a:lnTo>
+                <a:lnTo>
+                  <a:pt x="1801230" y="0"/>
+                </a:lnTo>
+                <a:lnTo>
+                  <a:pt x="1833394" y="0"/>
+                </a:lnTo>
+                <a:lnTo>
+                  <a:pt x="1865559" y="0"/>
+                </a:lnTo>
+                <a:lnTo>
+                  <a:pt x="1897724" y="0"/>
+                </a:lnTo>
+                <a:lnTo>
+                  <a:pt x="1929889" y="0"/>
+                </a:lnTo>
+                <a:lnTo>
+                  <a:pt x="1962054" y="0"/>
+                </a:lnTo>
+                <a:lnTo>
+                  <a:pt x="1994219" y="0"/>
+                </a:lnTo>
+                <a:lnTo>
+                  <a:pt x="2026383" y="0"/>
+                </a:lnTo>
+                <a:lnTo>
+                  <a:pt x="2058548" y="0"/>
+                </a:lnTo>
+                <a:lnTo>
+                  <a:pt x="2090713" y="0"/>
+                </a:lnTo>
+                <a:lnTo>
+                  <a:pt x="2122878" y="0"/>
+                </a:lnTo>
+                <a:lnTo>
+                  <a:pt x="2155043" y="0"/>
+                </a:lnTo>
+                <a:lnTo>
+                  <a:pt x="2187208" y="0"/>
+                </a:lnTo>
+                <a:lnTo>
+                  <a:pt x="2219372" y="0"/>
+                </a:lnTo>
+                <a:lnTo>
+                  <a:pt x="2251537" y="0"/>
+                </a:lnTo>
+                <a:lnTo>
+                  <a:pt x="2283702" y="0"/>
+                </a:lnTo>
+                <a:lnTo>
+                  <a:pt x="2315867" y="0"/>
+                </a:lnTo>
+                <a:lnTo>
+                  <a:pt x="2348032" y="0"/>
+                </a:lnTo>
+                <a:lnTo>
+                  <a:pt x="2380196" y="0"/>
+                </a:lnTo>
+                <a:lnTo>
+                  <a:pt x="2412361" y="0"/>
+                </a:lnTo>
+                <a:lnTo>
+                  <a:pt x="2444526" y="0"/>
+                </a:lnTo>
+                <a:lnTo>
+                  <a:pt x="2476691" y="0"/>
+                </a:lnTo>
+                <a:lnTo>
+                  <a:pt x="2508856" y="0"/>
+                </a:lnTo>
+                <a:lnTo>
+                  <a:pt x="2541021" y="0"/>
+                </a:lnTo>
+                <a:lnTo>
+                  <a:pt x="2573185" y="0"/>
+                </a:lnTo>
+                <a:lnTo>
+                  <a:pt x="2605350" y="0"/>
+                </a:lnTo>
+                <a:lnTo>
+                  <a:pt x="2637515" y="0"/>
+                </a:lnTo>
+                <a:lnTo>
+                  <a:pt x="2669680" y="0"/>
+                </a:lnTo>
+                <a:lnTo>
+                  <a:pt x="2701845" y="0"/>
+                </a:lnTo>
+                <a:lnTo>
+                  <a:pt x="2734010" y="0"/>
+                </a:lnTo>
+                <a:lnTo>
+                  <a:pt x="2766174" y="0"/>
+                </a:lnTo>
+                <a:lnTo>
+                  <a:pt x="2798339" y="0"/>
+                </a:lnTo>
+                <a:lnTo>
+                  <a:pt x="2830504" y="0"/>
+                </a:lnTo>
+                <a:lnTo>
+                  <a:pt x="2862669" y="0"/>
+                </a:lnTo>
+                <a:lnTo>
+                  <a:pt x="2894834" y="0"/>
+                </a:lnTo>
+                <a:lnTo>
+                  <a:pt x="2926998" y="0"/>
+                </a:lnTo>
+                <a:lnTo>
+                  <a:pt x="2959163" y="0"/>
+                </a:lnTo>
+                <a:lnTo>
+                  <a:pt x="2991328" y="0"/>
+                </a:lnTo>
+                <a:lnTo>
+                  <a:pt x="3023493" y="0"/>
+                </a:lnTo>
+                <a:lnTo>
+                  <a:pt x="3055658" y="0"/>
+                </a:lnTo>
+                <a:lnTo>
+                  <a:pt x="3087823" y="0"/>
+                </a:lnTo>
+                <a:lnTo>
+                  <a:pt x="3119987" y="0"/>
+                </a:lnTo>
+                <a:lnTo>
+                  <a:pt x="3152152" y="0"/>
+                </a:lnTo>
+                <a:lnTo>
+                  <a:pt x="3184317" y="0"/>
+                </a:lnTo>
+                <a:lnTo>
+                  <a:pt x="3216482" y="0"/>
+                </a:lnTo>
+                <a:lnTo>
+                  <a:pt x="3248647" y="0"/>
+                </a:lnTo>
+                <a:lnTo>
+                  <a:pt x="3280812" y="0"/>
+                </a:lnTo>
+                <a:lnTo>
+                  <a:pt x="3312976" y="0"/>
+                </a:lnTo>
+                <a:lnTo>
+                  <a:pt x="3345141" y="0"/>
+                </a:lnTo>
+                <a:lnTo>
+                  <a:pt x="3377306" y="0"/>
+                </a:lnTo>
+                <a:lnTo>
+                  <a:pt x="3409471" y="0"/>
+                </a:lnTo>
+                <a:lnTo>
+                  <a:pt x="3441636" y="0"/>
+                </a:lnTo>
+                <a:lnTo>
+                  <a:pt x="3473801" y="0"/>
+                </a:lnTo>
+                <a:lnTo>
+                  <a:pt x="3505965" y="0"/>
+                </a:lnTo>
+                <a:lnTo>
+                  <a:pt x="3538130" y="0"/>
+                </a:lnTo>
+                <a:lnTo>
+                  <a:pt x="3570295" y="27272"/>
+                </a:lnTo>
+                <a:lnTo>
+                  <a:pt x="3602460" y="57155"/>
+                </a:lnTo>
+                <a:lnTo>
+                  <a:pt x="3634625" y="87038"/>
+                </a:lnTo>
+                <a:lnTo>
+                  <a:pt x="3666789" y="116920"/>
+                </a:lnTo>
+                <a:lnTo>
+                  <a:pt x="3698954" y="146803"/>
+                </a:lnTo>
+                <a:lnTo>
+                  <a:pt x="3731119" y="176686"/>
+                </a:lnTo>
+                <a:lnTo>
+                  <a:pt x="3763284" y="206568"/>
+                </a:lnTo>
+                <a:lnTo>
+                  <a:pt x="3795449" y="236451"/>
+                </a:lnTo>
+                <a:lnTo>
+                  <a:pt x="3827614" y="266334"/>
+                </a:lnTo>
+                <a:lnTo>
+                  <a:pt x="3859778" y="296217"/>
+                </a:lnTo>
+                <a:lnTo>
+                  <a:pt x="3891943" y="326099"/>
+                </a:lnTo>
+                <a:lnTo>
+                  <a:pt x="3924108" y="355982"/>
+                </a:lnTo>
+                <a:lnTo>
+                  <a:pt x="3956273" y="385865"/>
+                </a:lnTo>
+                <a:lnTo>
+                  <a:pt x="3988438" y="415747"/>
+                </a:lnTo>
+                <a:lnTo>
+                  <a:pt x="4020603" y="445630"/>
+                </a:lnTo>
+                <a:lnTo>
+                  <a:pt x="4052767" y="475513"/>
+                </a:lnTo>
+                <a:lnTo>
+                  <a:pt x="4084932" y="505395"/>
+                </a:lnTo>
+                <a:lnTo>
+                  <a:pt x="4117097" y="535278"/>
+                </a:lnTo>
+                <a:lnTo>
+                  <a:pt x="4149262" y="565161"/>
+                </a:lnTo>
+                <a:lnTo>
+                  <a:pt x="4181427" y="595043"/>
+                </a:lnTo>
+                <a:lnTo>
+                  <a:pt x="4213591" y="624926"/>
+                </a:lnTo>
+                <a:lnTo>
+                  <a:pt x="4245756" y="654809"/>
+                </a:lnTo>
+                <a:lnTo>
+                  <a:pt x="4277921" y="684691"/>
+                </a:lnTo>
+                <a:lnTo>
+                  <a:pt x="4310086" y="714574"/>
+                </a:lnTo>
+                <a:lnTo>
+                  <a:pt x="4342251" y="744457"/>
+                </a:lnTo>
+                <a:lnTo>
+                  <a:pt x="4374416" y="774340"/>
+                </a:lnTo>
+                <a:lnTo>
+                  <a:pt x="4406580" y="804222"/>
+                </a:lnTo>
+                <a:lnTo>
+                  <a:pt x="4438745" y="834105"/>
+                </a:lnTo>
+                <a:lnTo>
+                  <a:pt x="4470910" y="863988"/>
+                </a:lnTo>
+                <a:lnTo>
+                  <a:pt x="4503075" y="893870"/>
+                </a:lnTo>
+                <a:lnTo>
+                  <a:pt x="4535240" y="923753"/>
+                </a:lnTo>
+                <a:lnTo>
+                  <a:pt x="4567405" y="953636"/>
+                </a:lnTo>
+                <a:lnTo>
+                  <a:pt x="4599569" y="983518"/>
+                </a:lnTo>
+                <a:lnTo>
+                  <a:pt x="4631734" y="1013401"/>
+                </a:lnTo>
+                <a:lnTo>
+                  <a:pt x="4663899" y="1043284"/>
+                </a:lnTo>
+                <a:lnTo>
+                  <a:pt x="4696064" y="1073166"/>
+                </a:lnTo>
+                <a:lnTo>
+                  <a:pt x="4728229" y="1103049"/>
+                </a:lnTo>
+                <a:lnTo>
+                  <a:pt x="4760393" y="1132932"/>
+                </a:lnTo>
+                <a:lnTo>
+                  <a:pt x="4792558" y="1162814"/>
+                </a:lnTo>
+                <a:lnTo>
+                  <a:pt x="4824723" y="1192697"/>
+                </a:lnTo>
+                <a:lnTo>
+                  <a:pt x="4856888" y="1222580"/>
+                </a:lnTo>
+                <a:lnTo>
+                  <a:pt x="4889053" y="1252463"/>
+                </a:lnTo>
+                <a:lnTo>
+                  <a:pt x="4921218" y="1282345"/>
+                </a:lnTo>
+                <a:lnTo>
+                  <a:pt x="4953382" y="1312228"/>
+                </a:lnTo>
+                <a:lnTo>
+                  <a:pt x="4985547" y="1342111"/>
+                </a:lnTo>
+                <a:lnTo>
+                  <a:pt x="5017712" y="1371993"/>
+                </a:lnTo>
+                <a:lnTo>
+                  <a:pt x="5049877" y="1401876"/>
+                </a:lnTo>
+                <a:lnTo>
+                  <a:pt x="5082042" y="1431759"/>
+                </a:lnTo>
+                <a:lnTo>
+                  <a:pt x="5114207" y="1461641"/>
+                </a:lnTo>
+                <a:lnTo>
+                  <a:pt x="5146371" y="1491524"/>
+                </a:lnTo>
+                <a:lnTo>
+                  <a:pt x="5178536" y="1521407"/>
+                </a:lnTo>
+                <a:lnTo>
+                  <a:pt x="5210701" y="1551289"/>
+                </a:lnTo>
+                <a:lnTo>
+                  <a:pt x="5242866" y="1581172"/>
+                </a:lnTo>
+                <a:lnTo>
+                  <a:pt x="5275031" y="1611055"/>
+                </a:lnTo>
+                <a:lnTo>
+                  <a:pt x="5307195" y="1640937"/>
+                </a:lnTo>
+                <a:lnTo>
+                  <a:pt x="5339360" y="1670820"/>
+                </a:lnTo>
+                <a:lnTo>
+                  <a:pt x="5371525" y="1700703"/>
+                </a:lnTo>
+                <a:lnTo>
+                  <a:pt x="5403690" y="1730586"/>
+                </a:lnTo>
+                <a:lnTo>
+                  <a:pt x="5435855" y="1760468"/>
+                </a:lnTo>
+                <a:lnTo>
+                  <a:pt x="5468020" y="1790351"/>
+                </a:lnTo>
+                <a:lnTo>
+                  <a:pt x="5500184" y="1820234"/>
+                </a:lnTo>
+                <a:lnTo>
+                  <a:pt x="5532349" y="1850116"/>
+                </a:lnTo>
+                <a:lnTo>
+                  <a:pt x="5564514" y="1879999"/>
+                </a:lnTo>
+                <a:lnTo>
+                  <a:pt x="5596679" y="1909882"/>
+                </a:lnTo>
+                <a:lnTo>
+                  <a:pt x="5628844" y="1939764"/>
+                </a:lnTo>
+                <a:lnTo>
+                  <a:pt x="5661009" y="1969647"/>
+                </a:lnTo>
+                <a:lnTo>
+                  <a:pt x="5693173" y="1999530"/>
+                </a:lnTo>
+                <a:lnTo>
+                  <a:pt x="5725338" y="2029412"/>
+                </a:lnTo>
+                <a:lnTo>
+                  <a:pt x="5757503" y="2059295"/>
+                </a:lnTo>
+                <a:lnTo>
+                  <a:pt x="5789668" y="2089178"/>
+                </a:lnTo>
+                <a:lnTo>
+                  <a:pt x="5821833" y="2119060"/>
+                </a:lnTo>
+                <a:lnTo>
+                  <a:pt x="5853997" y="2148943"/>
+                </a:lnTo>
+                <a:lnTo>
+                  <a:pt x="5886162" y="2178826"/>
+                </a:lnTo>
+                <a:lnTo>
+                  <a:pt x="5918327" y="2208709"/>
+                </a:lnTo>
+                <a:lnTo>
+                  <a:pt x="5950492" y="2238591"/>
+                </a:lnTo>
+                <a:lnTo>
+                  <a:pt x="5982657" y="2268474"/>
+                </a:lnTo>
+                <a:lnTo>
+                  <a:pt x="6014822" y="2298357"/>
+                </a:lnTo>
+                <a:lnTo>
+                  <a:pt x="6046986" y="2328239"/>
+                </a:lnTo>
+                <a:lnTo>
+                  <a:pt x="6079151" y="2358122"/>
+                </a:lnTo>
+                <a:lnTo>
+                  <a:pt x="6111316" y="2388005"/>
+                </a:lnTo>
+                <a:lnTo>
+                  <a:pt x="6143481" y="2417887"/>
+                </a:lnTo>
+                <a:lnTo>
+                  <a:pt x="6175646" y="2447770"/>
+                </a:lnTo>
+                <a:lnTo>
+                  <a:pt x="6207811" y="2477653"/>
+                </a:lnTo>
+                <a:lnTo>
+                  <a:pt x="6239975" y="2507535"/>
+                </a:lnTo>
+                <a:lnTo>
+                  <a:pt x="6272140" y="2537418"/>
+                </a:lnTo>
+                <a:lnTo>
+                  <a:pt x="6304305" y="2567301"/>
+                </a:lnTo>
+                <a:lnTo>
+                  <a:pt x="6336470" y="2597184"/>
+                </a:lnTo>
+                <a:lnTo>
+                  <a:pt x="6368635" y="2627066"/>
+                </a:lnTo>
+              </a:path>
+            </a:pathLst>
+          </a:custGeom>
+          <a:noFill/>
+          <a:ln w="38100">
+            <a:solidFill>
+              <a:srgbClr val="F2B880"/>
+            </a:solidFill>
+          </a:ln>
+          <a:effectLst/>
+        </p:spPr>
+        <p:txBody>
+          <a:bodyPr rtlCol="0" anchor="ctr"/>
+          <a:lstStyle/>
+          <a:p>
+            <a:pPr algn="ctr"/>
+          </a:p>
+        </p:txBody>
+      </p:sp>
+      <p:sp>
+        <p:nvSpPr>
+          <p:cNvPr id="29" name="C2-E26 ellipse 27" descr="sci-ppt:o027"/>
+          <p:cNvSpPr/>
+          <p:nvPr/>
+        </p:nvSpPr>
+        <p:spPr>
+          <a:xfrm>
+            <a:off x="4382188" y="2169298"/>
+            <a:ext cx="146304" cy="146304"/>
+          </a:xfrm>
+          <a:prstGeom prst="ellipse">
+            <a:avLst/>
+          </a:prstGeom>
+          <a:solidFill>
+            <a:srgbClr val="F2B880"/>
+          </a:solidFill>
+          <a:ln w="12700">
+            <a:solidFill>
+              <a:srgbClr val="F2B880"/>
+            </a:solidFill>
+          </a:ln>
+          <a:effectLst/>
+        </p:spPr>
+        <p:txBody>
+          <a:bodyPr rtlCol="0" anchor="ctr"/>
+          <a:lstStyle/>
+          <a:p>
+            <a:pPr algn="ctr"/>
+          </a:p>
+        </p:txBody>
+      </p:sp>
+      <p:sp>
+        <p:nvSpPr>
+          <p:cNvPr id="30" name="C2-E26 rect 28" descr="sci-ppt:o028"/>
+          <p:cNvSpPr/>
+          <p:nvPr/>
+        </p:nvSpPr>
+        <p:spPr>
+          <a:xfrm>
+            <a:off x="4846320" y="1947672"/>
+            <a:ext cx="274320" cy="182880"/>
+          </a:xfrm>
+          <a:prstGeom prst="rect">
+            <a:avLst/>
+          </a:prstGeom>
+          <a:solidFill>
+            <a:srgbClr val="F2B880"/>
+          </a:solidFill>
+          <a:ln w="12700">
+            <a:solidFill>
+              <a:srgbClr val="F2B880"/>
+            </a:solidFill>
+          </a:ln>
+          <a:effectLst/>
+        </p:spPr>
+        <p:txBody>
+          <a:bodyPr rtlCol="0" anchor="ctr"/>
+          <a:lstStyle/>
+          <a:p>
+            <a:pPr algn="ctr"/>
+          </a:p>
+        </p:txBody>
+      </p:sp>
+      <p:sp>
+        <p:nvSpPr>
+          <p:cNvPr id="31" name="C2-E26 text 29" descr="sci-ppt:o029"/>
           <p:cNvSpPr txBox="1"/>
           <p:nvPr/>
         </p:nvSpPr>
         <p:spPr>
           <a:xfrm>
-            <a:off x="2072640" y="1158240"/>
-            <a:ext cx="3657600" cy="321259"/>
+            <a:off x="5230368" y="1901952"/>
+            <a:ext cx="2194560" cy="223900"/>
           </a:xfrm>
           <a:prstGeom prst="rect">
             <a:avLst/>
@@ -3242,7 +4565,7 @@
           <a:effectLst/>
         </p:spPr>
         <p:txBody>
-          <a:bodyPr wrap="none" lIns="27432" rIns="27432" tIns="18288" bIns="18288" anchor="ctr">
+          <a:bodyPr wrap="none" lIns="18288" rIns="18288" tIns="18288" bIns="18288" anchor="t">
             <a:spAutoFit/>
           </a:bodyPr>
           <a:lstStyle/>
@@ -3253,159 +4576,1270 @@
               </a:spcAft>
             </a:pPr>
             <a:r>
-              <a:rPr sz="1632" b="0" i="0">
+              <a:rPr sz="1150" b="0" i="0">
+                <a:solidFill>
+                  <a:srgbClr val="F2B880"/>
+                </a:solidFill>
+                <a:latin typeface="Arial"/>
+              </a:rPr>
+              <a:t>40 °C: knee at 23 µm</a:t>
+            </a:r>
+          </a:p>
+        </p:txBody>
+      </p:sp>
+      <p:sp>
+        <p:nvSpPr>
+          <p:cNvPr id="32" name="C2-E26 polygon 30" descr="sci-ppt:o030"/>
+          <p:cNvSpPr/>
+          <p:nvPr/>
+        </p:nvSpPr>
+        <p:spPr>
+          <a:xfrm>
+            <a:off x="914400" y="2007973"/>
+            <a:ext cx="6368635" cy="2839070"/>
+          </a:xfrm>
+          <a:custGeom>
+            <a:avLst/>
+            <a:gdLst/>
+            <a:ahLst/>
+            <a:cxnLst/>
+            <a:rect l="l" t="t" r="r" b="b"/>
+            <a:pathLst>
+              <a:path w="6368635" h="2839070">
+                <a:moveTo>
+                  <a:pt x="0" y="0"/>
+                </a:moveTo>
+                <a:lnTo>
+                  <a:pt x="32164" y="0"/>
+                </a:lnTo>
+                <a:lnTo>
+                  <a:pt x="64329" y="0"/>
+                </a:lnTo>
+                <a:lnTo>
+                  <a:pt x="96494" y="0"/>
+                </a:lnTo>
+                <a:lnTo>
+                  <a:pt x="128659" y="0"/>
+                </a:lnTo>
+                <a:lnTo>
+                  <a:pt x="160824" y="0"/>
+                </a:lnTo>
+                <a:lnTo>
+                  <a:pt x="192988" y="0"/>
+                </a:lnTo>
+                <a:lnTo>
+                  <a:pt x="225153" y="0"/>
+                </a:lnTo>
+                <a:lnTo>
+                  <a:pt x="257318" y="0"/>
+                </a:lnTo>
+                <a:lnTo>
+                  <a:pt x="289483" y="0"/>
+                </a:lnTo>
+                <a:lnTo>
+                  <a:pt x="321648" y="0"/>
+                </a:lnTo>
+                <a:lnTo>
+                  <a:pt x="353813" y="0"/>
+                </a:lnTo>
+                <a:lnTo>
+                  <a:pt x="385977" y="0"/>
+                </a:lnTo>
+                <a:lnTo>
+                  <a:pt x="418142" y="0"/>
+                </a:lnTo>
+                <a:lnTo>
+                  <a:pt x="450307" y="0"/>
+                </a:lnTo>
+                <a:lnTo>
+                  <a:pt x="482472" y="0"/>
+                </a:lnTo>
+                <a:lnTo>
+                  <a:pt x="514637" y="0"/>
+                </a:lnTo>
+                <a:lnTo>
+                  <a:pt x="546802" y="0"/>
+                </a:lnTo>
+                <a:lnTo>
+                  <a:pt x="578966" y="0"/>
+                </a:lnTo>
+                <a:lnTo>
+                  <a:pt x="611131" y="0"/>
+                </a:lnTo>
+                <a:lnTo>
+                  <a:pt x="643296" y="0"/>
+                </a:lnTo>
+                <a:lnTo>
+                  <a:pt x="675461" y="0"/>
+                </a:lnTo>
+                <a:lnTo>
+                  <a:pt x="707626" y="0"/>
+                </a:lnTo>
+                <a:lnTo>
+                  <a:pt x="739790" y="0"/>
+                </a:lnTo>
+                <a:lnTo>
+                  <a:pt x="771955" y="0"/>
+                </a:lnTo>
+                <a:lnTo>
+                  <a:pt x="804120" y="0"/>
+                </a:lnTo>
+                <a:lnTo>
+                  <a:pt x="836285" y="0"/>
+                </a:lnTo>
+                <a:lnTo>
+                  <a:pt x="868450" y="0"/>
+                </a:lnTo>
+                <a:lnTo>
+                  <a:pt x="900615" y="0"/>
+                </a:lnTo>
+                <a:lnTo>
+                  <a:pt x="932779" y="0"/>
+                </a:lnTo>
+                <a:lnTo>
+                  <a:pt x="964944" y="0"/>
+                </a:lnTo>
+                <a:lnTo>
+                  <a:pt x="997109" y="0"/>
+                </a:lnTo>
+                <a:lnTo>
+                  <a:pt x="1029274" y="0"/>
+                </a:lnTo>
+                <a:lnTo>
+                  <a:pt x="1061439" y="0"/>
+                </a:lnTo>
+                <a:lnTo>
+                  <a:pt x="1093604" y="0"/>
+                </a:lnTo>
+                <a:lnTo>
+                  <a:pt x="1125768" y="0"/>
+                </a:lnTo>
+                <a:lnTo>
+                  <a:pt x="1157933" y="0"/>
+                </a:lnTo>
+                <a:lnTo>
+                  <a:pt x="1190098" y="0"/>
+                </a:lnTo>
+                <a:lnTo>
+                  <a:pt x="1222263" y="0"/>
+                </a:lnTo>
+                <a:lnTo>
+                  <a:pt x="1254428" y="0"/>
+                </a:lnTo>
+                <a:lnTo>
+                  <a:pt x="1286592" y="0"/>
+                </a:lnTo>
+                <a:lnTo>
+                  <a:pt x="1318757" y="0"/>
+                </a:lnTo>
+                <a:lnTo>
+                  <a:pt x="1350922" y="0"/>
+                </a:lnTo>
+                <a:lnTo>
+                  <a:pt x="1383087" y="0"/>
+                </a:lnTo>
+                <a:lnTo>
+                  <a:pt x="1415252" y="0"/>
+                </a:lnTo>
+                <a:lnTo>
+                  <a:pt x="1447417" y="0"/>
+                </a:lnTo>
+                <a:lnTo>
+                  <a:pt x="1479581" y="0"/>
+                </a:lnTo>
+                <a:lnTo>
+                  <a:pt x="1511746" y="0"/>
+                </a:lnTo>
+                <a:lnTo>
+                  <a:pt x="1543911" y="0"/>
+                </a:lnTo>
+                <a:lnTo>
+                  <a:pt x="1576076" y="0"/>
+                </a:lnTo>
+                <a:lnTo>
+                  <a:pt x="1608241" y="0"/>
+                </a:lnTo>
+                <a:lnTo>
+                  <a:pt x="1640406" y="0"/>
+                </a:lnTo>
+                <a:lnTo>
+                  <a:pt x="1672570" y="0"/>
+                </a:lnTo>
+                <a:lnTo>
+                  <a:pt x="1704735" y="0"/>
+                </a:lnTo>
+                <a:lnTo>
+                  <a:pt x="1736900" y="0"/>
+                </a:lnTo>
+                <a:lnTo>
+                  <a:pt x="1769065" y="0"/>
+                </a:lnTo>
+                <a:lnTo>
+                  <a:pt x="1801230" y="0"/>
+                </a:lnTo>
+                <a:lnTo>
+                  <a:pt x="1833394" y="0"/>
+                </a:lnTo>
+                <a:lnTo>
+                  <a:pt x="1865559" y="0"/>
+                </a:lnTo>
+                <a:lnTo>
+                  <a:pt x="1897724" y="0"/>
+                </a:lnTo>
+                <a:lnTo>
+                  <a:pt x="1929889" y="0"/>
+                </a:lnTo>
+                <a:lnTo>
+                  <a:pt x="1962054" y="0"/>
+                </a:lnTo>
+                <a:lnTo>
+                  <a:pt x="1994219" y="0"/>
+                </a:lnTo>
+                <a:lnTo>
+                  <a:pt x="2026383" y="0"/>
+                </a:lnTo>
+                <a:lnTo>
+                  <a:pt x="2058548" y="0"/>
+                </a:lnTo>
+                <a:lnTo>
+                  <a:pt x="2090713" y="0"/>
+                </a:lnTo>
+                <a:lnTo>
+                  <a:pt x="2122878" y="0"/>
+                </a:lnTo>
+                <a:lnTo>
+                  <a:pt x="2155043" y="0"/>
+                </a:lnTo>
+                <a:lnTo>
+                  <a:pt x="2187208" y="0"/>
+                </a:lnTo>
+                <a:lnTo>
+                  <a:pt x="2219372" y="0"/>
+                </a:lnTo>
+                <a:lnTo>
+                  <a:pt x="2251537" y="0"/>
+                </a:lnTo>
+                <a:lnTo>
+                  <a:pt x="2283702" y="0"/>
+                </a:lnTo>
+                <a:lnTo>
+                  <a:pt x="2315867" y="0"/>
+                </a:lnTo>
+                <a:lnTo>
+                  <a:pt x="2348032" y="0"/>
+                </a:lnTo>
+                <a:lnTo>
+                  <a:pt x="2380196" y="0"/>
+                </a:lnTo>
+                <a:lnTo>
+                  <a:pt x="2412361" y="0"/>
+                </a:lnTo>
+                <a:lnTo>
+                  <a:pt x="2444526" y="0"/>
+                </a:lnTo>
+                <a:lnTo>
+                  <a:pt x="2476691" y="0"/>
+                </a:lnTo>
+                <a:lnTo>
+                  <a:pt x="2508856" y="0"/>
+                </a:lnTo>
+                <a:lnTo>
+                  <a:pt x="2541021" y="0"/>
+                </a:lnTo>
+                <a:lnTo>
+                  <a:pt x="2573185" y="0"/>
+                </a:lnTo>
+                <a:lnTo>
+                  <a:pt x="2605350" y="0"/>
+                </a:lnTo>
+                <a:lnTo>
+                  <a:pt x="2637515" y="0"/>
+                </a:lnTo>
+                <a:lnTo>
+                  <a:pt x="2669680" y="0"/>
+                </a:lnTo>
+                <a:lnTo>
+                  <a:pt x="2701845" y="0"/>
+                </a:lnTo>
+                <a:lnTo>
+                  <a:pt x="2734010" y="0"/>
+                </a:lnTo>
+                <a:lnTo>
+                  <a:pt x="2766174" y="0"/>
+                </a:lnTo>
+                <a:lnTo>
+                  <a:pt x="2798339" y="0"/>
+                </a:lnTo>
+                <a:lnTo>
+                  <a:pt x="2830504" y="0"/>
+                </a:lnTo>
+                <a:lnTo>
+                  <a:pt x="2862669" y="0"/>
+                </a:lnTo>
+                <a:lnTo>
+                  <a:pt x="2894834" y="0"/>
+                </a:lnTo>
+                <a:lnTo>
+                  <a:pt x="2926998" y="0"/>
+                </a:lnTo>
+                <a:lnTo>
+                  <a:pt x="2959163" y="0"/>
+                </a:lnTo>
+                <a:lnTo>
+                  <a:pt x="2991328" y="0"/>
+                </a:lnTo>
+                <a:lnTo>
+                  <a:pt x="3023493" y="0"/>
+                </a:lnTo>
+                <a:lnTo>
+                  <a:pt x="3055658" y="0"/>
+                </a:lnTo>
+                <a:lnTo>
+                  <a:pt x="3087823" y="0"/>
+                </a:lnTo>
+                <a:lnTo>
+                  <a:pt x="3119987" y="0"/>
+                </a:lnTo>
+                <a:lnTo>
+                  <a:pt x="3152152" y="0"/>
+                </a:lnTo>
+                <a:lnTo>
+                  <a:pt x="3184317" y="0"/>
+                </a:lnTo>
+                <a:lnTo>
+                  <a:pt x="3216482" y="0"/>
+                </a:lnTo>
+                <a:lnTo>
+                  <a:pt x="3248647" y="0"/>
+                </a:lnTo>
+                <a:lnTo>
+                  <a:pt x="3280812" y="0"/>
+                </a:lnTo>
+                <a:lnTo>
+                  <a:pt x="3312976" y="214"/>
+                </a:lnTo>
+                <a:lnTo>
+                  <a:pt x="3345141" y="30097"/>
+                </a:lnTo>
+                <a:lnTo>
+                  <a:pt x="3377306" y="59980"/>
+                </a:lnTo>
+                <a:lnTo>
+                  <a:pt x="3409471" y="89862"/>
+                </a:lnTo>
+                <a:lnTo>
+                  <a:pt x="3441636" y="119745"/>
+                </a:lnTo>
+                <a:lnTo>
+                  <a:pt x="3473801" y="149628"/>
+                </a:lnTo>
+                <a:lnTo>
+                  <a:pt x="3505965" y="179511"/>
+                </a:lnTo>
+                <a:lnTo>
+                  <a:pt x="3538130" y="209393"/>
+                </a:lnTo>
+                <a:lnTo>
+                  <a:pt x="3570295" y="239276"/>
+                </a:lnTo>
+                <a:lnTo>
+                  <a:pt x="3602460" y="269159"/>
+                </a:lnTo>
+                <a:lnTo>
+                  <a:pt x="3634625" y="299041"/>
+                </a:lnTo>
+                <a:lnTo>
+                  <a:pt x="3666789" y="328924"/>
+                </a:lnTo>
+                <a:lnTo>
+                  <a:pt x="3698954" y="358807"/>
+                </a:lnTo>
+                <a:lnTo>
+                  <a:pt x="3731119" y="388689"/>
+                </a:lnTo>
+                <a:lnTo>
+                  <a:pt x="3763284" y="418572"/>
+                </a:lnTo>
+                <a:lnTo>
+                  <a:pt x="3795449" y="448455"/>
+                </a:lnTo>
+                <a:lnTo>
+                  <a:pt x="3827614" y="478337"/>
+                </a:lnTo>
+                <a:lnTo>
+                  <a:pt x="3859778" y="508220"/>
+                </a:lnTo>
+                <a:lnTo>
+                  <a:pt x="3891943" y="538103"/>
+                </a:lnTo>
+                <a:lnTo>
+                  <a:pt x="3924108" y="567985"/>
+                </a:lnTo>
+                <a:lnTo>
+                  <a:pt x="3956273" y="597868"/>
+                </a:lnTo>
+                <a:lnTo>
+                  <a:pt x="3988438" y="627751"/>
+                </a:lnTo>
+                <a:lnTo>
+                  <a:pt x="4020603" y="657634"/>
+                </a:lnTo>
+                <a:lnTo>
+                  <a:pt x="4052767" y="687516"/>
+                </a:lnTo>
+                <a:lnTo>
+                  <a:pt x="4084932" y="717399"/>
+                </a:lnTo>
+                <a:lnTo>
+                  <a:pt x="4117097" y="747282"/>
+                </a:lnTo>
+                <a:lnTo>
+                  <a:pt x="4149262" y="777164"/>
+                </a:lnTo>
+                <a:lnTo>
+                  <a:pt x="4181427" y="807047"/>
+                </a:lnTo>
+                <a:lnTo>
+                  <a:pt x="4213591" y="836930"/>
+                </a:lnTo>
+                <a:lnTo>
+                  <a:pt x="4245756" y="866812"/>
+                </a:lnTo>
+                <a:lnTo>
+                  <a:pt x="4277921" y="896695"/>
+                </a:lnTo>
+                <a:lnTo>
+                  <a:pt x="4310086" y="926578"/>
+                </a:lnTo>
+                <a:lnTo>
+                  <a:pt x="4342251" y="956460"/>
+                </a:lnTo>
+                <a:lnTo>
+                  <a:pt x="4374416" y="986343"/>
+                </a:lnTo>
+                <a:lnTo>
+                  <a:pt x="4406580" y="1016226"/>
+                </a:lnTo>
+                <a:lnTo>
+                  <a:pt x="4438745" y="1046108"/>
+                </a:lnTo>
+                <a:lnTo>
+                  <a:pt x="4470910" y="1075991"/>
+                </a:lnTo>
+                <a:lnTo>
+                  <a:pt x="4503075" y="1105874"/>
+                </a:lnTo>
+                <a:lnTo>
+                  <a:pt x="4535240" y="1135757"/>
+                </a:lnTo>
+                <a:lnTo>
+                  <a:pt x="4567405" y="1165639"/>
+                </a:lnTo>
+                <a:lnTo>
+                  <a:pt x="4599569" y="1195522"/>
+                </a:lnTo>
+                <a:lnTo>
+                  <a:pt x="4631734" y="1225405"/>
+                </a:lnTo>
+                <a:lnTo>
+                  <a:pt x="4663899" y="1255287"/>
+                </a:lnTo>
+                <a:lnTo>
+                  <a:pt x="4696064" y="1285170"/>
+                </a:lnTo>
+                <a:lnTo>
+                  <a:pt x="4728229" y="1315053"/>
+                </a:lnTo>
+                <a:lnTo>
+                  <a:pt x="4760393" y="1344935"/>
+                </a:lnTo>
+                <a:lnTo>
+                  <a:pt x="4792558" y="1374818"/>
+                </a:lnTo>
+                <a:lnTo>
+                  <a:pt x="4824723" y="1404701"/>
+                </a:lnTo>
+                <a:lnTo>
+                  <a:pt x="4856888" y="1434583"/>
+                </a:lnTo>
+                <a:lnTo>
+                  <a:pt x="4889053" y="1464466"/>
+                </a:lnTo>
+                <a:lnTo>
+                  <a:pt x="4921218" y="1494349"/>
+                </a:lnTo>
+                <a:lnTo>
+                  <a:pt x="4953382" y="1524231"/>
+                </a:lnTo>
+                <a:lnTo>
+                  <a:pt x="4985547" y="1554114"/>
+                </a:lnTo>
+                <a:lnTo>
+                  <a:pt x="5017712" y="1583997"/>
+                </a:lnTo>
+                <a:lnTo>
+                  <a:pt x="5049877" y="1613880"/>
+                </a:lnTo>
+                <a:lnTo>
+                  <a:pt x="5082042" y="1643762"/>
+                </a:lnTo>
+                <a:lnTo>
+                  <a:pt x="5114207" y="1673645"/>
+                </a:lnTo>
+                <a:lnTo>
+                  <a:pt x="5146371" y="1703528"/>
+                </a:lnTo>
+                <a:lnTo>
+                  <a:pt x="5178536" y="1733410"/>
+                </a:lnTo>
+                <a:lnTo>
+                  <a:pt x="5210701" y="1763293"/>
+                </a:lnTo>
+                <a:lnTo>
+                  <a:pt x="5242866" y="1793176"/>
+                </a:lnTo>
+                <a:lnTo>
+                  <a:pt x="5275031" y="1823058"/>
+                </a:lnTo>
+                <a:lnTo>
+                  <a:pt x="5307195" y="1852941"/>
+                </a:lnTo>
+                <a:lnTo>
+                  <a:pt x="5339360" y="1882824"/>
+                </a:lnTo>
+                <a:lnTo>
+                  <a:pt x="5371525" y="1912706"/>
+                </a:lnTo>
+                <a:lnTo>
+                  <a:pt x="5403690" y="1942589"/>
+                </a:lnTo>
+                <a:lnTo>
+                  <a:pt x="5435855" y="1972472"/>
+                </a:lnTo>
+                <a:lnTo>
+                  <a:pt x="5468020" y="2002354"/>
+                </a:lnTo>
+                <a:lnTo>
+                  <a:pt x="5500184" y="2032237"/>
+                </a:lnTo>
+                <a:lnTo>
+                  <a:pt x="5532349" y="2062120"/>
+                </a:lnTo>
+                <a:lnTo>
+                  <a:pt x="5564514" y="2092003"/>
+                </a:lnTo>
+                <a:lnTo>
+                  <a:pt x="5596679" y="2121885"/>
+                </a:lnTo>
+                <a:lnTo>
+                  <a:pt x="5628844" y="2151768"/>
+                </a:lnTo>
+                <a:lnTo>
+                  <a:pt x="5661009" y="2181651"/>
+                </a:lnTo>
+                <a:lnTo>
+                  <a:pt x="5693173" y="2211533"/>
+                </a:lnTo>
+                <a:lnTo>
+                  <a:pt x="5725338" y="2241416"/>
+                </a:lnTo>
+                <a:lnTo>
+                  <a:pt x="5757503" y="2271299"/>
+                </a:lnTo>
+                <a:lnTo>
+                  <a:pt x="5789668" y="2301181"/>
+                </a:lnTo>
+                <a:lnTo>
+                  <a:pt x="5821833" y="2331064"/>
+                </a:lnTo>
+                <a:lnTo>
+                  <a:pt x="5853997" y="2360947"/>
+                </a:lnTo>
+                <a:lnTo>
+                  <a:pt x="5886162" y="2390829"/>
+                </a:lnTo>
+                <a:lnTo>
+                  <a:pt x="5918327" y="2420712"/>
+                </a:lnTo>
+                <a:lnTo>
+                  <a:pt x="5950492" y="2450595"/>
+                </a:lnTo>
+                <a:lnTo>
+                  <a:pt x="5982657" y="2480477"/>
+                </a:lnTo>
+                <a:lnTo>
+                  <a:pt x="6014822" y="2510360"/>
+                </a:lnTo>
+                <a:lnTo>
+                  <a:pt x="6046986" y="2540243"/>
+                </a:lnTo>
+                <a:lnTo>
+                  <a:pt x="6079151" y="2570126"/>
+                </a:lnTo>
+                <a:lnTo>
+                  <a:pt x="6111316" y="2600008"/>
+                </a:lnTo>
+                <a:lnTo>
+                  <a:pt x="6143481" y="2629891"/>
+                </a:lnTo>
+                <a:lnTo>
+                  <a:pt x="6175646" y="2659774"/>
+                </a:lnTo>
+                <a:lnTo>
+                  <a:pt x="6207811" y="2689656"/>
+                </a:lnTo>
+                <a:lnTo>
+                  <a:pt x="6239975" y="2719539"/>
+                </a:lnTo>
+                <a:lnTo>
+                  <a:pt x="6272140" y="2749422"/>
+                </a:lnTo>
+                <a:lnTo>
+                  <a:pt x="6304305" y="2779304"/>
+                </a:lnTo>
+                <a:lnTo>
+                  <a:pt x="6336470" y="2809187"/>
+                </a:lnTo>
+                <a:lnTo>
+                  <a:pt x="6368635" y="2839070"/>
+                </a:lnTo>
+              </a:path>
+            </a:pathLst>
+          </a:custGeom>
+          <a:noFill/>
+          <a:ln w="38100">
+            <a:solidFill>
+              <a:srgbClr val="8EDBD4"/>
+            </a:solidFill>
+          </a:ln>
+          <a:effectLst/>
+        </p:spPr>
+        <p:txBody>
+          <a:bodyPr rtlCol="0" anchor="ctr"/>
+          <a:lstStyle/>
+          <a:p>
+            <a:pPr algn="ctr"/>
+          </a:p>
+        </p:txBody>
+      </p:sp>
+      <p:sp>
+        <p:nvSpPr>
+          <p:cNvPr id="33" name="C2-E26 ellipse 31" descr="sci-ppt:o031"/>
+          <p:cNvSpPr/>
+          <p:nvPr/>
+        </p:nvSpPr>
+        <p:spPr>
+          <a:xfrm>
+            <a:off x="4153994" y="1934821"/>
+            <a:ext cx="146304" cy="146304"/>
+          </a:xfrm>
+          <a:prstGeom prst="ellipse">
+            <a:avLst/>
+          </a:prstGeom>
+          <a:solidFill>
+            <a:srgbClr val="8EDBD4"/>
+          </a:solidFill>
+          <a:ln w="12700">
+            <a:solidFill>
+              <a:srgbClr val="8EDBD4"/>
+            </a:solidFill>
+          </a:ln>
+          <a:effectLst/>
+        </p:spPr>
+        <p:txBody>
+          <a:bodyPr rtlCol="0" anchor="ctr"/>
+          <a:lstStyle/>
+          <a:p>
+            <a:pPr algn="ctr"/>
+          </a:p>
+        </p:txBody>
+      </p:sp>
+      <p:sp>
+        <p:nvSpPr>
+          <p:cNvPr id="34" name="C2-E26 rect 32" descr="sci-ppt:o032"/>
+          <p:cNvSpPr/>
+          <p:nvPr/>
+        </p:nvSpPr>
+        <p:spPr>
+          <a:xfrm>
+            <a:off x="4846320" y="1600200"/>
+            <a:ext cx="274320" cy="182880"/>
+          </a:xfrm>
+          <a:prstGeom prst="rect">
+            <a:avLst/>
+          </a:prstGeom>
+          <a:solidFill>
+            <a:srgbClr val="8EDBD4"/>
+          </a:solidFill>
+          <a:ln w="12700">
+            <a:solidFill>
+              <a:srgbClr val="8EDBD4"/>
+            </a:solidFill>
+          </a:ln>
+          <a:effectLst/>
+        </p:spPr>
+        <p:txBody>
+          <a:bodyPr rtlCol="0" anchor="ctr"/>
+          <a:lstStyle/>
+          <a:p>
+            <a:pPr algn="ctr"/>
+          </a:p>
+        </p:txBody>
+      </p:sp>
+      <p:sp>
+        <p:nvSpPr>
+          <p:cNvPr id="35" name="C2-E26 text 33" descr="sci-ppt:o033"/>
+          <p:cNvSpPr txBox="1"/>
+          <p:nvPr/>
+        </p:nvSpPr>
+        <p:spPr>
+          <a:xfrm>
+            <a:off x="5230368" y="1554480"/>
+            <a:ext cx="2194560" cy="223900"/>
+          </a:xfrm>
+          <a:prstGeom prst="rect">
+            <a:avLst/>
+          </a:prstGeom>
+          <a:noFill/>
+          <a:effectLst/>
+        </p:spPr>
+        <p:txBody>
+          <a:bodyPr wrap="none" lIns="18288" rIns="18288" tIns="18288" bIns="18288" anchor="t">
+            <a:spAutoFit/>
+          </a:bodyPr>
+          <a:lstStyle/>
+          <a:p>
+            <a:pPr algn="l">
+              <a:spcAft>
+                <a:spcPts val="0"/>
+              </a:spcAft>
+            </a:pPr>
+            <a:r>
+              <a:rPr sz="1150" b="0" i="0">
+                <a:solidFill>
+                  <a:srgbClr val="8EDBD4"/>
+                </a:solidFill>
+                <a:latin typeface="Arial"/>
+              </a:rPr>
+              <a:t>50 °C: knee at 21 µm</a:t>
+            </a:r>
+          </a:p>
+        </p:txBody>
+      </p:sp>
+      <p:sp>
+        <p:nvSpPr>
+          <p:cNvPr id="36" name="C2-E26 text 34" descr="sci-ppt:o034"/>
+          <p:cNvSpPr txBox="1"/>
+          <p:nvPr/>
+        </p:nvSpPr>
+        <p:spPr>
+          <a:xfrm>
+            <a:off x="1122071" y="2454101"/>
+            <a:ext cx="2011680" cy="402081"/>
+          </a:xfrm>
+          <a:prstGeom prst="rect">
+            <a:avLst/>
+          </a:prstGeom>
+          <a:noFill/>
+          <a:effectLst/>
+        </p:spPr>
+        <p:txBody>
+          <a:bodyPr wrap="none" lIns="18288" rIns="18288" tIns="18288" bIns="18288" anchor="t">
+            <a:spAutoFit/>
+          </a:bodyPr>
+          <a:lstStyle/>
+          <a:p>
+            <a:pPr algn="l">
+              <a:spcAft>
+                <a:spcPts val="0"/>
+              </a:spcAft>
+            </a:pPr>
+            <a:r>
+              <a:rPr sz="1150" b="0" i="0">
                 <a:solidFill>
                   <a:srgbClr val="E7F0F3"/>
                 </a:solidFill>
                 <a:latin typeface="Arial"/>
               </a:rPr>
-              <a:t>PFC partial pressure</a:t>
-            </a:r>
-          </a:p>
-        </p:txBody>
-      </p:sp>
-      <p:cxnSp>
-        <p:nvCxnSpPr>
-          <p:cNvPr id="7" name="line6" descr="sci-ppt:C2-E26-006"/>
-          <p:cNvCxnSpPr/>
+              <a:t>liquid still present:</a:t>
+            </a:r>
+          </a:p>
+          <a:p>
+            <a:pPr algn="l">
+              <a:spcAft>
+                <a:spcPts val="0"/>
+              </a:spcAft>
+            </a:pPr>
+            <a:r>
+              <a:rPr sz="1150" b="0" i="0">
+                <a:solidFill>
+                  <a:srgbClr val="E7F0F3"/>
+                </a:solidFill>
+                <a:latin typeface="Arial"/>
+              </a:rPr>
+              <a:t>p = pₛₐₜ(T)</a:t>
+            </a:r>
+          </a:p>
+        </p:txBody>
+      </p:sp>
+      <p:sp>
+        <p:nvSpPr>
+          <p:cNvPr id="37" name="C2-E26 text 35" descr="sci-ppt:o035"/>
+          <p:cNvSpPr txBox="1"/>
           <p:nvPr/>
-        </p:nvCxnSpPr>
-        <p:spPr>
-          <a:xfrm>
-            <a:off x="2255520" y="2011680"/>
-            <a:ext cx="2865120" cy="0"/>
-          </a:xfrm>
-          <a:prstGeom prst="line">
+        </p:nvSpPr>
+        <p:spPr>
+          <a:xfrm>
+            <a:off x="1764332" y="3889425"/>
+            <a:ext cx="3108960" cy="402081"/>
+          </a:xfrm>
+          <a:prstGeom prst="rect">
             <a:avLst/>
           </a:prstGeom>
-          <a:ln w="25400">
+          <a:noFill/>
+          <a:effectLst/>
+        </p:spPr>
+        <p:txBody>
+          <a:bodyPr wrap="none" lIns="18288" rIns="18288" tIns="18288" bIns="18288" anchor="t">
+            <a:spAutoFit/>
+          </a:bodyPr>
+          <a:lstStyle/>
+          <a:p>
+            <a:pPr algn="l">
+              <a:spcAft>
+                <a:spcPts val="0"/>
+              </a:spcAft>
+            </a:pPr>
+            <a:r>
+              <a:rPr sz="1150" b="0" i="0">
+                <a:solidFill>
+                  <a:srgbClr val="E7F0F3"/>
+                </a:solidFill>
+                <a:latin typeface="Arial"/>
+              </a:rPr>
+              <a:t>inventory exhausted:</a:t>
+            </a:r>
+          </a:p>
+          <a:p>
+            <a:pPr algn="l">
+              <a:spcAft>
+                <a:spcPts val="0"/>
+              </a:spcAft>
+            </a:pPr>
+            <a:r>
+              <a:rPr sz="1150" b="0" i="0">
+                <a:solidFill>
+                  <a:srgbClr val="E7F0F3"/>
+                </a:solidFill>
+                <a:latin typeface="Arial"/>
+              </a:rPr>
+              <a:t>p = mR_uT/(MV) falls as 1/R³</a:t>
+            </a:r>
+          </a:p>
+        </p:txBody>
+      </p:sp>
+      <p:sp>
+        <p:nvSpPr>
+          <p:cNvPr id="38" name="C2-E26 round_rect 36" descr="sci-ppt:o036"/>
+          <p:cNvSpPr/>
+          <p:nvPr/>
+        </p:nvSpPr>
+        <p:spPr>
+          <a:xfrm>
+            <a:off x="7589520" y="1371600"/>
+            <a:ext cx="4251960" cy="3657600"/>
+          </a:xfrm>
+          <a:prstGeom prst="roundRect">
+            <a:avLst/>
+          </a:prstGeom>
+          <a:solidFill>
+            <a:srgbClr val="213E4B"/>
+          </a:solidFill>
+          <a:ln w="20320">
             <a:solidFill>
               <a:srgbClr val="8EDBD4"/>
             </a:solidFill>
           </a:ln>
           <a:effectLst/>
         </p:spPr>
-      </p:cxnSp>
-      <p:cxnSp>
-        <p:nvCxnSpPr>
-          <p:cNvPr id="8" name="line7" descr="sci-ppt:C2-E26-007"/>
-          <p:cNvCxnSpPr/>
+        <p:txBody>
+          <a:bodyPr rtlCol="0" anchor="ctr"/>
+          <a:lstStyle/>
+          <a:p>
+            <a:pPr algn="ctr"/>
+          </a:p>
+        </p:txBody>
+      </p:sp>
+      <p:sp>
+        <p:nvSpPr>
+          <p:cNvPr id="39" name="C2-E26 text 37" descr="sci-ppt:o037"/>
+          <p:cNvSpPr txBox="1"/>
           <p:nvPr/>
-        </p:nvCxnSpPr>
-        <p:spPr>
-          <a:xfrm>
-            <a:off x="5120640" y="2011680"/>
-            <a:ext cx="365760" cy="0"/>
-          </a:xfrm>
-          <a:prstGeom prst="line">
+        </p:nvSpPr>
+        <p:spPr>
+          <a:xfrm>
+            <a:off x="7699248" y="1426464"/>
+            <a:ext cx="4032504" cy="254889"/>
+          </a:xfrm>
+          <a:prstGeom prst="rect">
             <a:avLst/>
           </a:prstGeom>
-          <a:ln w="25400">
+          <a:noFill/>
+          <a:effectLst/>
+        </p:spPr>
+        <p:txBody>
+          <a:bodyPr wrap="none" lIns="18288" rIns="18288" tIns="18288" bIns="18288" anchor="t">
+            <a:spAutoFit/>
+          </a:bodyPr>
+          <a:lstStyle/>
+          <a:p>
+            <a:pPr algn="l">
+              <a:spcAft>
+                <a:spcPts val="0"/>
+              </a:spcAft>
+            </a:pPr>
+            <a:r>
+              <a:rPr sz="1350" b="1" i="0">
+                <a:solidFill>
+                  <a:srgbClr val="8EDBD4"/>
+                </a:solidFill>
+                <a:latin typeface="Arial"/>
+              </a:rPr>
+              <a:t>min[ saturation, inventory ]</a:t>
+            </a:r>
+          </a:p>
+        </p:txBody>
+      </p:sp>
+      <p:sp>
+        <p:nvSpPr>
+          <p:cNvPr id="40" name="C2-E26 text 38" descr="sci-ppt:o038"/>
+          <p:cNvSpPr txBox="1"/>
+          <p:nvPr/>
+        </p:nvSpPr>
+        <p:spPr>
+          <a:xfrm>
+            <a:off x="7726679" y="1828800"/>
+            <a:ext cx="4023360" cy="433070"/>
+          </a:xfrm>
+          <a:prstGeom prst="rect">
+            <a:avLst/>
+          </a:prstGeom>
+          <a:noFill/>
+          <a:effectLst/>
+        </p:spPr>
+        <p:txBody>
+          <a:bodyPr wrap="none" lIns="18288" rIns="18288" tIns="18288" bIns="18288" anchor="t">
+            <a:spAutoFit/>
+          </a:bodyPr>
+          <a:lstStyle/>
+          <a:p>
+            <a:pPr algn="l">
+              <a:spcAft>
+                <a:spcPts val="0"/>
+              </a:spcAft>
+            </a:pPr>
+            <a:r>
+              <a:rPr sz="1250" b="1" i="0">
+                <a:solidFill>
+                  <a:srgbClr val="E7F0F3"/>
+                </a:solidFill>
+                <a:latin typeface="Arial"/>
+              </a:rPr>
+              <a:t>pᵥ,eq = min[ pₛₐₜ(T_b),  m_PFC,0 Rᵤ T_b /</a:t>
+            </a:r>
+          </a:p>
+          <a:p>
+            <a:pPr algn="l">
+              <a:spcAft>
+                <a:spcPts val="0"/>
+              </a:spcAft>
+            </a:pPr>
+            <a:r>
+              <a:rPr sz="1250" b="1" i="0">
+                <a:solidFill>
+                  <a:srgbClr val="E7F0F3"/>
+                </a:solidFill>
+                <a:latin typeface="Arial"/>
+              </a:rPr>
+              <a:t>(M_PFC V_b) ]</a:t>
+            </a:r>
+          </a:p>
+        </p:txBody>
+      </p:sp>
+      <p:sp>
+        <p:nvSpPr>
+          <p:cNvPr id="41" name="C2-E26 text 39" descr="sci-ppt:o039"/>
+          <p:cNvSpPr txBox="1"/>
+          <p:nvPr/>
+        </p:nvSpPr>
+        <p:spPr>
+          <a:xfrm>
+            <a:off x="7927848" y="2606040"/>
+            <a:ext cx="3822192" cy="417576"/>
+          </a:xfrm>
+          <a:prstGeom prst="rect">
+            <a:avLst/>
+          </a:prstGeom>
+          <a:noFill/>
+          <a:effectLst/>
+        </p:spPr>
+        <p:txBody>
+          <a:bodyPr wrap="none" lIns="18288" rIns="18288" tIns="18288" bIns="18288" anchor="t">
+            <a:spAutoFit/>
+          </a:bodyPr>
+          <a:lstStyle/>
+          <a:p>
+            <a:pPr algn="l">
+              <a:spcAft>
+                <a:spcPts val="0"/>
+              </a:spcAft>
+            </a:pPr>
+            <a:r>
+              <a:rPr sz="1200" b="0" i="0">
+                <a:solidFill>
+                  <a:srgbClr val="E7F0F3"/>
+                </a:solidFill>
+                <a:latin typeface="Arial"/>
+              </a:rPr>
+              <a:t>Until all liquid evaporates the pressure is</a:t>
+            </a:r>
+          </a:p>
+          <a:p>
+            <a:pPr algn="l">
+              <a:spcAft>
+                <a:spcPts val="0"/>
+              </a:spcAft>
+            </a:pPr>
+            <a:r>
+              <a:rPr sz="1200" b="0" i="0">
+                <a:solidFill>
+                  <a:srgbClr val="E7F0F3"/>
+                </a:solidFill>
+                <a:latin typeface="Arial"/>
+              </a:rPr>
+              <a:t>pinned at pₛₐₜ.</a:t>
+            </a:r>
+          </a:p>
+        </p:txBody>
+      </p:sp>
+      <p:sp>
+        <p:nvSpPr>
+          <p:cNvPr id="42" name="C2-E26 ellipse 40" descr="sci-ppt:o040"/>
+          <p:cNvSpPr/>
+          <p:nvPr/>
+        </p:nvSpPr>
+        <p:spPr>
+          <a:xfrm>
+            <a:off x="7758683" y="2659380"/>
+            <a:ext cx="82296" cy="82296"/>
+          </a:xfrm>
+          <a:prstGeom prst="ellipse">
+            <a:avLst/>
+          </a:prstGeom>
+          <a:solidFill>
+            <a:srgbClr val="8EDBD4"/>
+          </a:solidFill>
+          <a:ln w="12700">
             <a:solidFill>
               <a:srgbClr val="8EDBD4"/>
             </a:solidFill>
           </a:ln>
           <a:effectLst/>
         </p:spPr>
-      </p:cxnSp>
-      <p:cxnSp>
-        <p:nvCxnSpPr>
-          <p:cNvPr id="9" name="line8" descr="sci-ppt:C2-E26-008"/>
-          <p:cNvCxnSpPr/>
+        <p:txBody>
+          <a:bodyPr rtlCol="0" anchor="ctr"/>
+          <a:lstStyle/>
+          <a:p>
+            <a:pPr algn="ctr"/>
+          </a:p>
+        </p:txBody>
+      </p:sp>
+      <p:sp>
+        <p:nvSpPr>
+          <p:cNvPr id="43" name="C2-E26 text 41" descr="sci-ppt:o041"/>
+          <p:cNvSpPr txBox="1"/>
           <p:nvPr/>
-        </p:nvCxnSpPr>
-        <p:spPr>
-          <a:xfrm>
-            <a:off x="5486400" y="2011680"/>
-            <a:ext cx="609600" cy="487680"/>
-          </a:xfrm>
-          <a:prstGeom prst="line">
+        </p:nvSpPr>
+        <p:spPr>
+          <a:xfrm>
+            <a:off x="7927848" y="3069336"/>
+            <a:ext cx="3822192" cy="417576"/>
+          </a:xfrm>
+          <a:prstGeom prst="rect">
             <a:avLst/>
           </a:prstGeom>
-          <a:ln w="25400">
+          <a:noFill/>
+          <a:effectLst/>
+        </p:spPr>
+        <p:txBody>
+          <a:bodyPr wrap="none" lIns="18288" rIns="18288" tIns="18288" bIns="18288" anchor="t">
+            <a:spAutoFit/>
+          </a:bodyPr>
+          <a:lstStyle/>
+          <a:p>
+            <a:pPr algn="l">
+              <a:spcAft>
+                <a:spcPts val="0"/>
+              </a:spcAft>
+            </a:pPr>
+            <a:r>
+              <a:rPr sz="1200" b="0" i="0">
+                <a:solidFill>
+                  <a:srgbClr val="E7F0F3"/>
+                </a:solidFill>
+                <a:latin typeface="Arial"/>
+              </a:rPr>
+              <a:t>After that the finite inventory cannot supply</a:t>
+            </a:r>
+          </a:p>
+          <a:p>
+            <a:pPr algn="l">
+              <a:spcAft>
+                <a:spcPts val="0"/>
+              </a:spcAft>
+            </a:pPr>
+            <a:r>
+              <a:rPr sz="1200" b="0" i="0">
+                <a:solidFill>
+                  <a:srgbClr val="E7F0F3"/>
+                </a:solidFill>
+                <a:latin typeface="Arial"/>
+              </a:rPr>
+              <a:t>more vapor, so p falls as the bubble grows.</a:t>
+            </a:r>
+          </a:p>
+        </p:txBody>
+      </p:sp>
+      <p:sp>
+        <p:nvSpPr>
+          <p:cNvPr id="44" name="C2-E26 ellipse 42" descr="sci-ppt:o042"/>
+          <p:cNvSpPr/>
+          <p:nvPr/>
+        </p:nvSpPr>
+        <p:spPr>
+          <a:xfrm>
+            <a:off x="7758683" y="3122676"/>
+            <a:ext cx="82296" cy="82296"/>
+          </a:xfrm>
+          <a:prstGeom prst="ellipse">
+            <a:avLst/>
+          </a:prstGeom>
+          <a:solidFill>
+            <a:srgbClr val="8EDBD4"/>
+          </a:solidFill>
+          <a:ln w="12700">
             <a:solidFill>
               <a:srgbClr val="8EDBD4"/>
             </a:solidFill>
           </a:ln>
           <a:effectLst/>
         </p:spPr>
-      </p:cxnSp>
-      <p:cxnSp>
-        <p:nvCxnSpPr>
-          <p:cNvPr id="10" name="line9" descr="sci-ppt:C2-E26-009"/>
-          <p:cNvCxnSpPr/>
+        <p:txBody>
+          <a:bodyPr rtlCol="0" anchor="ctr"/>
+          <a:lstStyle/>
+          <a:p>
+            <a:pPr algn="ctr"/>
+          </a:p>
+        </p:txBody>
+      </p:sp>
+      <p:sp>
+        <p:nvSpPr>
+          <p:cNvPr id="45" name="C2-E26 text 43" descr="sci-ppt:o043"/>
+          <p:cNvSpPr txBox="1"/>
           <p:nvPr/>
-        </p:nvCxnSpPr>
-        <p:spPr>
-          <a:xfrm>
-            <a:off x="6096000" y="2499360"/>
-            <a:ext cx="1097280" cy="548640"/>
-          </a:xfrm>
-          <a:prstGeom prst="line">
+        </p:nvSpPr>
+        <p:spPr>
+          <a:xfrm>
+            <a:off x="7927848" y="3532631"/>
+            <a:ext cx="3822192" cy="417576"/>
+          </a:xfrm>
+          <a:prstGeom prst="rect">
             <a:avLst/>
           </a:prstGeom>
-          <a:ln w="25400">
+          <a:noFill/>
+          <a:effectLst/>
+        </p:spPr>
+        <p:txBody>
+          <a:bodyPr wrap="none" lIns="18288" rIns="18288" tIns="18288" bIns="18288" anchor="t">
+            <a:spAutoFit/>
+          </a:bodyPr>
+          <a:lstStyle/>
+          <a:p>
+            <a:pPr algn="l">
+              <a:spcAft>
+                <a:spcPts val="0"/>
+              </a:spcAft>
+            </a:pPr>
+            <a:r>
+              <a:rPr sz="1200" b="0" i="0">
+                <a:solidFill>
+                  <a:srgbClr val="E7F0F3"/>
+                </a:solidFill>
+                <a:latin typeface="Arial"/>
+              </a:rPr>
+              <a:t>Assumes a closed, non-dissolving supply and</a:t>
+            </a:r>
+          </a:p>
+          <a:p>
+            <a:pPr algn="l">
+              <a:spcAft>
+                <a:spcPts val="0"/>
+              </a:spcAft>
+            </a:pPr>
+            <a:r>
+              <a:rPr sz="1200" b="0" i="0">
+                <a:solidFill>
+                  <a:srgbClr val="E7F0F3"/>
+                </a:solidFill>
+                <a:latin typeface="Arial"/>
+              </a:rPr>
+              <a:t>fast mass exchange.</a:t>
+            </a:r>
+          </a:p>
+        </p:txBody>
+      </p:sp>
+      <p:sp>
+        <p:nvSpPr>
+          <p:cNvPr id="46" name="C2-E26 ellipse 44" descr="sci-ppt:o044"/>
+          <p:cNvSpPr/>
+          <p:nvPr/>
+        </p:nvSpPr>
+        <p:spPr>
+          <a:xfrm>
+            <a:off x="7758683" y="3585972"/>
+            <a:ext cx="82296" cy="82296"/>
+          </a:xfrm>
+          <a:prstGeom prst="ellipse">
+            <a:avLst/>
+          </a:prstGeom>
+          <a:solidFill>
+            <a:srgbClr val="8EDBD4"/>
+          </a:solidFill>
+          <a:ln w="12700">
             <a:solidFill>
               <a:srgbClr val="8EDBD4"/>
             </a:solidFill>
           </a:ln>
           <a:effectLst/>
         </p:spPr>
-      </p:cxnSp>
-      <p:cxnSp>
-        <p:nvCxnSpPr>
-          <p:cNvPr id="11" name="line10" descr="sci-ppt:C2-E26-010"/>
-          <p:cNvCxnSpPr/>
-          <p:nvPr/>
-        </p:nvCxnSpPr>
-        <p:spPr>
-          <a:xfrm>
-            <a:off x="7193280" y="3048000"/>
-            <a:ext cx="1341120" cy="341376"/>
-          </a:xfrm>
-          <a:prstGeom prst="line">
-            <a:avLst/>
-          </a:prstGeom>
-          <a:ln w="25400">
-            <a:solidFill>
-              <a:srgbClr val="8EDBD4"/>
-            </a:solidFill>
-          </a:ln>
-          <a:effectLst/>
-        </p:spPr>
-      </p:cxnSp>
-      <p:cxnSp>
-        <p:nvCxnSpPr>
-          <p:cNvPr id="12" name="line11" descr="sci-ppt:C2-E26-011"/>
-          <p:cNvCxnSpPr/>
-          <p:nvPr/>
-        </p:nvCxnSpPr>
-        <p:spPr>
-          <a:xfrm>
-            <a:off x="8534400" y="3389376"/>
-            <a:ext cx="1341120" cy="182880"/>
-          </a:xfrm>
-          <a:prstGeom prst="line">
-            <a:avLst/>
-          </a:prstGeom>
-          <a:ln w="25400">
-            <a:solidFill>
-              <a:srgbClr val="8EDBD4"/>
-            </a:solidFill>
-          </a:ln>
-          <a:effectLst/>
-        </p:spPr>
-      </p:cxnSp>
-      <p:sp>
-        <p:nvSpPr>
-          <p:cNvPr id="13" name="text12" descr="sci-ppt:C2-E26-012"/>
+        <p:txBody>
+          <a:bodyPr rtlCol="0" anchor="ctr"/>
+          <a:lstStyle/>
+          <a:p>
+            <a:pPr algn="ctr"/>
+          </a:p>
+        </p:txBody>
+      </p:sp>
+      <p:sp>
+        <p:nvSpPr>
+          <p:cNvPr id="47" name="C2-E26 text 45" descr="sci-ppt:o045"/>
           <p:cNvSpPr txBox="1"/>
           <p:nvPr/>
         </p:nvSpPr>
         <p:spPr>
           <a:xfrm>
-            <a:off x="2560320" y="1463040"/>
-            <a:ext cx="3657600" cy="377952"/>
+            <a:off x="914400" y="5733288"/>
+            <a:ext cx="10972800" cy="239395"/>
           </a:xfrm>
           <a:prstGeom prst="rect">
             <a:avLst/>
@@ -3414,7 +5848,7 @@
           <a:effectLst/>
         </p:spPr>
         <p:txBody>
-          <a:bodyPr wrap="none" lIns="27432" rIns="27432" tIns="18288" bIns="18288" anchor="ctr">
+          <a:bodyPr wrap="none" lIns="18288" rIns="18288" tIns="18288" bIns="18288" anchor="t">
             <a:spAutoFit/>
           </a:bodyPr>
           <a:lstStyle/>
@@ -3425,27 +5859,27 @@
               </a:spcAft>
             </a:pPr>
             <a:r>
-              <a:rPr sz="1920" b="0" i="0">
+              <a:rPr sz="1250" b="0" i="0">
                 <a:solidFill>
                   <a:srgbClr val="E7F0F3"/>
                 </a:solidFill>
                 <a:latin typeface="Arial"/>
               </a:rPr>
-              <a:t>Saturation branch</a:t>
-            </a:r>
-          </a:p>
-        </p:txBody>
-      </p:sp>
-      <p:sp>
-        <p:nvSpPr>
-          <p:cNvPr id="14" name="text13" descr="sci-ppt:C2-E26-013"/>
+              <a:t>Equilibrium benchmark for the 0.8535 ng inventory of a 5 µm core at two prescribed temperatures.</a:t>
+            </a:r>
+          </a:p>
+        </p:txBody>
+      </p:sp>
+      <p:sp>
+        <p:nvSpPr>
+          <p:cNvPr id="48" name="C2-E26 text 46" descr="sci-ppt:o046"/>
           <p:cNvSpPr txBox="1"/>
           <p:nvPr/>
         </p:nvSpPr>
         <p:spPr>
           <a:xfrm>
-            <a:off x="6096000" y="2133600"/>
-            <a:ext cx="5364480" cy="340156"/>
+            <a:off x="320040" y="6510528"/>
+            <a:ext cx="11521440" cy="200660"/>
           </a:xfrm>
           <a:prstGeom prst="rect">
             <a:avLst/>
@@ -3454,7 +5888,7 @@
           <a:effectLst/>
         </p:spPr>
         <p:txBody>
-          <a:bodyPr wrap="none" lIns="27432" rIns="27432" tIns="18288" bIns="18288" anchor="ctr">
+          <a:bodyPr wrap="none" lIns="18288" rIns="18288" tIns="18288" bIns="18288" anchor="t">
             <a:spAutoFit/>
           </a:bodyPr>
           <a:lstStyle/>
@@ -3465,413 +5899,13 @@
               </a:spcAft>
             </a:pPr>
             <a:r>
-              <a:rPr sz="1728" b="0" i="0">
-                <a:solidFill>
-                  <a:srgbClr val="E7F0F3"/>
-                </a:solidFill>
-                <a:latin typeface="Arial"/>
-              </a:rPr>
-              <a:t>Finite-mass branch: p ~ 1/V</a:t>
-            </a:r>
-          </a:p>
-        </p:txBody>
-      </p:sp>
-      <p:sp>
-        <p:nvSpPr>
-          <p:cNvPr id="15" name="text14" descr="sci-ppt:C2-E26-014"/>
-          <p:cNvSpPr txBox="1"/>
-          <p:nvPr/>
-        </p:nvSpPr>
-        <p:spPr>
-          <a:xfrm>
-            <a:off x="365760" y="4974336"/>
-            <a:ext cx="5547360" cy="321259"/>
-          </a:xfrm>
-          <a:prstGeom prst="rect">
-            <a:avLst/>
-          </a:prstGeom>
-          <a:noFill/>
-          <a:effectLst/>
-        </p:spPr>
-        <p:txBody>
-          <a:bodyPr wrap="none" lIns="27432" rIns="27432" tIns="18288" bIns="18288" anchor="ctr">
-            <a:spAutoFit/>
-          </a:bodyPr>
-          <a:lstStyle/>
-          <a:p>
-            <a:pPr algn="l">
-              <a:spcAft>
-                <a:spcPts val="0"/>
-              </a:spcAft>
-            </a:pPr>
-            <a:r>
-              <a:rPr sz="1632" b="0" i="0">
-                <a:solidFill>
-                  <a:srgbClr val="E7F0F3"/>
-                </a:solidFill>
-                <a:latin typeface="Arial"/>
-              </a:rPr>
-              <a:t>m_PFC,0: total available compound</a:t>
-            </a:r>
-          </a:p>
-        </p:txBody>
-      </p:sp>
-      <p:sp>
-        <p:nvSpPr>
-          <p:cNvPr id="16" name="text15" descr="sci-ppt:C2-E26-015"/>
-          <p:cNvSpPr txBox="1"/>
-          <p:nvPr/>
-        </p:nvSpPr>
-        <p:spPr>
-          <a:xfrm>
-            <a:off x="365760" y="5266944"/>
-            <a:ext cx="5547360" cy="321259"/>
-          </a:xfrm>
-          <a:prstGeom prst="rect">
-            <a:avLst/>
-          </a:prstGeom>
-          <a:noFill/>
-          <a:effectLst/>
-        </p:spPr>
-        <p:txBody>
-          <a:bodyPr wrap="none" lIns="27432" rIns="27432" tIns="18288" bIns="18288" anchor="ctr">
-            <a:spAutoFit/>
-          </a:bodyPr>
-          <a:lstStyle/>
-          <a:p>
-            <a:pPr algn="l">
-              <a:spcAft>
-                <a:spcPts val="0"/>
-              </a:spcAft>
-            </a:pPr>
-            <a:r>
-              <a:rPr sz="1632" b="0" i="0">
-                <a:solidFill>
-                  <a:srgbClr val="E7F0F3"/>
-                </a:solidFill>
-                <a:latin typeface="Arial"/>
-              </a:rPr>
-              <a:t>M_PFC, R_u: mole-to-mass conversion</a:t>
-            </a:r>
-          </a:p>
-        </p:txBody>
-      </p:sp>
-      <p:sp>
-        <p:nvSpPr>
-          <p:cNvPr id="17" name="text16" descr="sci-ppt:C2-E26-016"/>
-          <p:cNvSpPr txBox="1"/>
-          <p:nvPr/>
-        </p:nvSpPr>
-        <p:spPr>
-          <a:xfrm>
-            <a:off x="365760" y="5559552"/>
-            <a:ext cx="5547360" cy="321259"/>
-          </a:xfrm>
-          <a:prstGeom prst="rect">
-            <a:avLst/>
-          </a:prstGeom>
-          <a:noFill/>
-          <a:effectLst/>
-        </p:spPr>
-        <p:txBody>
-          <a:bodyPr wrap="none" lIns="27432" rIns="27432" tIns="18288" bIns="18288" anchor="ctr">
-            <a:spAutoFit/>
-          </a:bodyPr>
-          <a:lstStyle/>
-          <a:p>
-            <a:pPr algn="l">
-              <a:spcAft>
-                <a:spcPts val="0"/>
-              </a:spcAft>
-            </a:pPr>
-            <a:r>
-              <a:rPr sz="1632" b="0" i="0">
-                <a:solidFill>
-                  <a:srgbClr val="E7F0F3"/>
-                </a:solidFill>
-                <a:latin typeface="Arial"/>
-              </a:rPr>
-              <a:t>V_b: available vapor volume</a:t>
-            </a:r>
-          </a:p>
-        </p:txBody>
-      </p:sp>
-      <p:sp>
-        <p:nvSpPr>
-          <p:cNvPr id="18" name="text17" descr="sci-ppt:C2-E26-017"/>
-          <p:cNvSpPr txBox="1"/>
-          <p:nvPr/>
-        </p:nvSpPr>
-        <p:spPr>
-          <a:xfrm>
-            <a:off x="365760" y="5852160"/>
-            <a:ext cx="5547360" cy="321259"/>
-          </a:xfrm>
-          <a:prstGeom prst="rect">
-            <a:avLst/>
-          </a:prstGeom>
-          <a:noFill/>
-          <a:effectLst/>
-        </p:spPr>
-        <p:txBody>
-          <a:bodyPr wrap="none" lIns="27432" rIns="27432" tIns="18288" bIns="18288" anchor="ctr">
-            <a:spAutoFit/>
-          </a:bodyPr>
-          <a:lstStyle/>
-          <a:p>
-            <a:pPr algn="l">
-              <a:spcAft>
-                <a:spcPts val="0"/>
-              </a:spcAft>
-            </a:pPr>
-            <a:r>
-              <a:rPr sz="1632" b="0" i="0">
-                <a:solidFill>
-                  <a:srgbClr val="E7F0F3"/>
-                </a:solidFill>
-                <a:latin typeface="Arial"/>
-              </a:rPr>
-              <a:t>p_v,PFC,eq: inventory-limited pressure</a:t>
-            </a:r>
-          </a:p>
-        </p:txBody>
-      </p:sp>
-      <p:sp>
-        <p:nvSpPr>
-          <p:cNvPr id="19" name="text18" descr="sci-ppt:C2-E26-018"/>
-          <p:cNvSpPr txBox="1"/>
-          <p:nvPr/>
-        </p:nvSpPr>
-        <p:spPr>
-          <a:xfrm>
-            <a:off x="6156960" y="4974336"/>
-            <a:ext cx="5547360" cy="321259"/>
-          </a:xfrm>
-          <a:prstGeom prst="rect">
-            <a:avLst/>
-          </a:prstGeom>
-          <a:noFill/>
-          <a:effectLst/>
-        </p:spPr>
-        <p:txBody>
-          <a:bodyPr wrap="none" lIns="27432" rIns="27432" tIns="18288" bIns="18288" anchor="ctr">
-            <a:spAutoFit/>
-          </a:bodyPr>
-          <a:lstStyle/>
-          <a:p>
-            <a:pPr algn="l">
-              <a:spcAft>
-                <a:spcPts val="0"/>
-              </a:spcAft>
-            </a:pPr>
-            <a:r>
-              <a:rPr sz="1632" b="0" i="0">
-                <a:solidFill>
-                  <a:srgbClr val="E7F0F3"/>
-                </a:solidFill>
-                <a:latin typeface="Arial"/>
-              </a:rPr>
-              <a:t>m_v,eq: actual equilibrium vapor mass</a:t>
-            </a:r>
-          </a:p>
-        </p:txBody>
-      </p:sp>
-      <p:sp>
-        <p:nvSpPr>
-          <p:cNvPr id="20" name="text19" descr="sci-ppt:C2-E26-019"/>
-          <p:cNvSpPr txBox="1"/>
-          <p:nvPr/>
-        </p:nvSpPr>
-        <p:spPr>
-          <a:xfrm>
-            <a:off x="6156960" y="5266944"/>
-            <a:ext cx="5547360" cy="321259"/>
-          </a:xfrm>
-          <a:prstGeom prst="rect">
-            <a:avLst/>
-          </a:prstGeom>
-          <a:noFill/>
-          <a:effectLst/>
-        </p:spPr>
-        <p:txBody>
-          <a:bodyPr wrap="none" lIns="27432" rIns="27432" tIns="18288" bIns="18288" anchor="ctr">
-            <a:spAutoFit/>
-          </a:bodyPr>
-          <a:lstStyle/>
-          <a:p>
-            <a:pPr algn="l">
-              <a:spcAft>
-                <a:spcPts val="0"/>
-              </a:spcAft>
-            </a:pPr>
-            <a:r>
-              <a:rPr sz="1632" b="0" i="0">
-                <a:solidFill>
-                  <a:srgbClr val="E7F0F3"/>
-                </a:solidFill>
-                <a:latin typeface="Arial"/>
-              </a:rPr>
-              <a:t>T_b: prescribed thermal state</a:t>
-            </a:r>
-          </a:p>
-        </p:txBody>
-      </p:sp>
-      <p:sp>
-        <p:nvSpPr>
-          <p:cNvPr id="21" name="text20" descr="sci-ppt:C2-E26-020"/>
-          <p:cNvSpPr txBox="1"/>
-          <p:nvPr/>
-        </p:nvSpPr>
-        <p:spPr>
-          <a:xfrm>
-            <a:off x="6156960" y="5559552"/>
-            <a:ext cx="5547360" cy="321259"/>
-          </a:xfrm>
-          <a:prstGeom prst="rect">
-            <a:avLst/>
-          </a:prstGeom>
-          <a:noFill/>
-          <a:effectLst/>
-        </p:spPr>
-        <p:txBody>
-          <a:bodyPr wrap="none" lIns="27432" rIns="27432" tIns="18288" bIns="18288" anchor="ctr">
-            <a:spAutoFit/>
-          </a:bodyPr>
-          <a:lstStyle/>
-          <a:p>
-            <a:pPr algn="l">
-              <a:spcAft>
-                <a:spcPts val="0"/>
-              </a:spcAft>
-            </a:pPr>
-            <a:r>
-              <a:rPr sz="1632" b="0" i="0">
-                <a:solidFill>
-                  <a:srgbClr val="E7F0F3"/>
-                </a:solidFill>
-                <a:latin typeface="Arial"/>
-              </a:rPr>
-              <a:t>p_sat,PFC: coexistence ceiling</a:t>
-            </a:r>
-          </a:p>
-        </p:txBody>
-      </p:sp>
-      <p:sp>
-        <p:nvSpPr>
-          <p:cNvPr id="22" name="text21" descr="sci-ppt:C2-E26-021"/>
-          <p:cNvSpPr txBox="1"/>
-          <p:nvPr/>
-        </p:nvSpPr>
-        <p:spPr>
-          <a:xfrm>
-            <a:off x="6156960" y="5852160"/>
-            <a:ext cx="5547360" cy="321259"/>
-          </a:xfrm>
-          <a:prstGeom prst="rect">
-            <a:avLst/>
-          </a:prstGeom>
-          <a:noFill/>
-          <a:effectLst/>
-        </p:spPr>
-        <p:txBody>
-          <a:bodyPr wrap="none" lIns="27432" rIns="27432" tIns="18288" bIns="18288" anchor="ctr">
-            <a:spAutoFit/>
-          </a:bodyPr>
-          <a:lstStyle/>
-          <a:p>
-            <a:pPr algn="l">
-              <a:spcAft>
-                <a:spcPts val="0"/>
-              </a:spcAft>
-            </a:pPr>
-            <a:r>
-              <a:rPr sz="1632" b="0" i="0">
-                <a:solidFill>
-                  <a:srgbClr val="E7F0F3"/>
-                </a:solidFill>
-                <a:latin typeface="Arial"/>
-              </a:rPr>
-              <a:t>min: choose supply or saturation branch</a:t>
-            </a:r>
-          </a:p>
-        </p:txBody>
-      </p:sp>
-      <p:sp>
-        <p:nvSpPr>
-          <p:cNvPr id="23" name="text22" descr="sci-ppt:C2-E26-022"/>
-          <p:cNvSpPr txBox="1"/>
-          <p:nvPr/>
-        </p:nvSpPr>
-        <p:spPr>
-          <a:xfrm>
-            <a:off x="365760" y="6339840"/>
-            <a:ext cx="11277600" cy="302361"/>
-          </a:xfrm>
-          <a:prstGeom prst="rect">
-            <a:avLst/>
-          </a:prstGeom>
-          <a:noFill/>
-          <a:effectLst/>
-        </p:spPr>
-        <p:txBody>
-          <a:bodyPr wrap="none" lIns="27432" rIns="27432" tIns="18288" bIns="18288" anchor="ctr">
-            <a:spAutoFit/>
-          </a:bodyPr>
-          <a:lstStyle/>
-          <a:p>
-            <a:pPr algn="l">
-              <a:spcAft>
-                <a:spcPts val="0"/>
-              </a:spcAft>
-            </a:pPr>
-            <a:r>
-              <a:rPr sz="1536" b="0" i="0">
+              <a:rPr sz="1000" b="0" i="0">
                 <a:solidFill>
                   <a:srgbClr val="B4C7D2"/>
                 </a:solidFill>
                 <a:latin typeface="Arial"/>
               </a:rPr>
-              <a:t>Small vapor volume can coexist with remaining liquid</a:t>
-            </a:r>
-          </a:p>
-        </p:txBody>
-      </p:sp>
-      <p:sp>
-        <p:nvSpPr>
-          <p:cNvPr id="24" name="text23" descr="sci-ppt:C2-E26-023"/>
-          <p:cNvSpPr txBox="1"/>
-          <p:nvPr/>
-        </p:nvSpPr>
-        <p:spPr>
-          <a:xfrm>
-            <a:off x="365760" y="6632448"/>
-            <a:ext cx="11277600" cy="302361"/>
-          </a:xfrm>
-          <a:prstGeom prst="rect">
-            <a:avLst/>
-          </a:prstGeom>
-          <a:noFill/>
-          <a:effectLst/>
-        </p:spPr>
-        <p:txBody>
-          <a:bodyPr wrap="none" lIns="27432" rIns="27432" tIns="18288" bIns="18288" anchor="ctr">
-            <a:spAutoFit/>
-          </a:bodyPr>
-          <a:lstStyle/>
-          <a:p>
-            <a:pPr algn="l">
-              <a:spcAft>
-                <a:spcPts val="0"/>
-              </a:spcAft>
-            </a:pPr>
-            <a:r>
-              <a:rPr sz="1536" b="0" i="0">
-                <a:solidFill>
-                  <a:srgbClr val="B4C7D2"/>
-                </a:solidFill>
-                <a:latin typeface="Arial"/>
-              </a:rPr>
-              <a:t>A fully vaporized large volume cannot maintain saturation without more PFC</a:t>
+              <a:t>Finite-inventory benchmark of Eq. C2-E26 with pₛₐₜ from Eq. C2-E12.</a:t>
             </a:r>
           </a:p>
         </p:txBody>
